--- a/it/slides/16-Architettura_dei_Calcolatori-Memoria_Permanente.pptx
+++ b/it/slides/16-Architettura_dei_Calcolatori-Memoria_Permanente.pptx
@@ -126,32 +126,32 @@
   <p:extLst>
     <p:ext uri="{521415D9-36F7-43E2-AB2F-B90AF26B5E84}">
       <p14:sectionLst xmlns:p14="http://schemas.microsoft.com/office/powerpoint/2010/main">
-        <p14:section name="Apertura" id="{a0ea5d03-3b4b-6b20-2213-2309bd4a8a24}">
+        <p14:section name="Apertura" id="{05c72963-93bd-4b69-3d1e-3928f0be1ef0}">
           <p14:sldIdLst>
             <p14:sldId id="256"/>
             <p14:sldId id="257"/>
           </p14:sldIdLst>
         </p14:section>
-        <p14:section name="I componenti di un calcolatore" id="{e14846c6-f95b-7987-9713-a84ddb28da73}">
+        <p14:section name="I componenti di un calcolatore" id="{0ea5a381-9118-4601-3177-91ff64b96fc0}">
           <p14:sldIdLst>
             <p14:sldId id="258"/>
             <p14:sldId id="259"/>
           </p14:sldIdLst>
         </p14:section>
-        <p14:section name="Memorie non volatili" id="{8e806b5d-6b73-8ebc-32df-5a22c27ed5c7}">
+        <p14:section name="Memorie non volatili" id="{d3a4c1dd-02f9-c4a8-9354-fcdfc399e90d}">
           <p14:sldIdLst>
             <p14:sldId id="260"/>
             <p14:sldId id="261"/>
           </p14:sldIdLst>
         </p14:section>
-        <p14:section name="La cache" id="{188070e8-034e-056e-d22f-a944a4f68fb4}">
+        <p14:section name="La cache" id="{f056629f-2edb-63cb-1a71-d63aec4dbf80}">
           <p14:sldIdLst>
             <p14:sldId id="262"/>
             <p14:sldId id="263"/>
             <p14:sldId id="264"/>
           </p14:sldIdLst>
         </p14:section>
-        <p14:section name="La memoria secondaria" id="{4bde1b60-70f1-7b34-f0d0-32e445b58e54}">
+        <p14:section name="La memoria secondaria" id="{fe922b48-552c-b4f5-e2ee-7dd0f7525a96}">
           <p14:sldIdLst>
             <p14:sldId id="265"/>
             <p14:sldId id="266"/>
@@ -159,13 +159,13 @@
             <p14:sldId id="268"/>
           </p14:sldIdLst>
         </p14:section>
-        <p14:section name="Dischi ottici" id="{1bd29984-62bb-7946-368b-e6e3d9f18393}">
+        <p14:section name="Dischi ottici" id="{85b998b5-6784-28be-ddba-130983962140}">
           <p14:sldIdLst>
             <p14:sldId id="269"/>
             <p14:sldId id="270"/>
           </p14:sldIdLst>
         </p14:section>
-        <p14:section name="La memoria di massa a più livelli" id="{a51e915d-4aa0-f843-d09c-b13004306b51}">
+        <p14:section name="La memoria di massa a più livelli" id="{9a95524f-68cb-571f-9f40-a39ce931a323}">
           <p14:sldIdLst>
             <p14:sldId id="271"/>
             <p14:sldId id="272"/>
@@ -668,7 +668,8 @@
             <a:r>
               <a:rPr lang="en-US" dirty="0"/>
               <a:t>Quattro proprietà definiscono le memorie secondarie rispetto alla memoria centrale. Sono non volatili. La loro capacità è di diversi ordini di grandezza maggiore. Il loro costo per bit è di diversi ordini di grandezza minore. E il loro accesso è di alcuni ordini di grandezza più lento. Altri due fatti riguardano l'organizzazione: l'informazione è memorizzata a blocchi, non a byte singoli, e alcuni supporti permettono l'accesso diretto a qualunque blocco mentre altri, come i nastri, solo l'accesso sequenziale.
-Per il docente: La memoria secondaria memorizza e conserva tutti i programmi e i dati del calcolatore; la memoria centrale contiene i programmi in esecuzione e i dati che servono loro.</a:t>
+Per il docente: La memoria secondaria memorizza e conserva tutti i programmi e i dati del calcolatore; la memoria centrale contiene i programmi in esecuzione e i dati che servono loro.
+Immagini: Open hard-drive.jpg, Zzubnik, Public domain, Wikimedia Commons.</a:t>
             </a:r>
             <a:endParaRPr lang="en-US" dirty="0"/>
           </a:p>
@@ -1024,7 +1025,8 @@
             <a:r>
               <a:rPr lang="en-US" dirty="0"/>
               <a:t>Un disco ottico è letto da un raggio laser la cui riflessione cambia tra le cavità, i pit, e la superficie piana, il land. Il punto che all'esame viene sempre chiesto: 0 e 1 non sono pit e land. Un 1 è un cambiamento, da pit a land o da land a pit; uno 0 è nessun cambiamento. Questi dischi di solito si scrivono una volta sola, perché la modifica fisica è irreversibile, e questo li rende adatti a distribuire programmi e ad archivi che non devono essere alterati.
-Per il docente: Codificare un 1 come transizione è un'idea autosincronizzante, usata anche in molti collegamenti seriali.</a:t>
+Per il docente: Codificare un 1 come transizione è un'idea autosincronizzante, usata anche in molti collegamenti seriali.
+Immagini: CD-ROM pressed pits.jpg, Tycho, CC0, Wikimedia Commons.</a:t>
             </a:r>
             <a:endParaRPr lang="en-US" dirty="0"/>
           </a:p>
@@ -1113,7 +1115,8 @@
             <a:r>
               <a:rPr lang="en-US" dirty="0"/>
               <a:t>In un compact disc l'informazione sta su un'unica traccia a spirale, con una distanza di 1,6 micrometri tra una spira e la successiva. La densità di registrazione è costante lungo la spirale, quindi per leggere a ritmo costante il disco deve girare più in fretta vicino al centro e più lentamente vicino al bordo: è la velocità lineare costante. L'alternativa, la velocità angolare costante, tiene costante la rotazione e spreca la parte esterna del disco. La velocità fu fissata in origine dalle esigenze della musica.
-Per il docente: 1x = 1,2 m/s. CD registrabile: due strati di policarbonato racchiudono un sottile foglio riflettente coperto da un colorante traslucido.</a:t>
+Per il docente: 1x = 1,2 m/s. CD registrabile: due strati di policarbonato racchiudono un sottile foglio riflettente coperto da un colorante traslucido.
+Immagini: CD Player focusing lens assembly.jpg, Zim 256, CC BY-SA 3.0, Wikimedia Commons.</a:t>
             </a:r>
             <a:endParaRPr lang="en-US" dirty="0"/>
           </a:p>
@@ -1560,7 +1563,7 @@
           <a:p>
             <a:r>
               <a:rPr lang="en-US" dirty="0"/>
-              <a:t>Sei obiettivi. Nominare le unità funzionali di un calcolatore e trovarle su una scheda madre e sul kit. Distinguere ROM, PROM, EPROM, EEPROM e flash, e dire che cos'è il firmware. Spiegare perché una cache rende più veloce un calcolatore, e che cos'è un miss. Descrivere tracce, settori e blocchi di un disco magnetico e le componenti del suo tempo di accesso. Spiegare come un disco ottico memorizza i bit. E collocare flash, dischi a stato solido, dischi rigidi e nastri in un sistema di memoria a più livelli.</a:t>
+              <a:t>Sei obiettivi. Nominare le unità funzionali di un calcolatore e trovarle su una scheda madre e sul kit. Distinguere ROM, PROM, EPROM, EEPROM e flash, e dire che cos'è il firmware. Spiegare perché una cache rende più veloce un calcolatore, e che cos'è un miss. Descrivere tracce, settori e blocchi di un disco magnetico e le componenti del suo tempo di accesso. Spiegare come un disco ottico memorizza i bit, e come si legge un compact disc. E collocare flash, dischi a stato solido, dischi rigidi e nastri in un sistema di memoria a più livelli.</a:t>
             </a:r>
             <a:endParaRPr lang="en-US" dirty="0"/>
           </a:p>
@@ -2004,7 +2007,8 @@
             <a:r>
               <a:rPr lang="en-US" dirty="0"/>
               <a:t>Tre proprietà della flash spiegano come la si usa. Si cancella a blocchi, non a byte singoli: cancellare porta a 1 tutti i bit di un blocco, e scrivere può solo trasformare degli 1 in 0. Ogni blocco sopporta un numero limitato di cancellazioni, quindi un controllore distribuisce le scritture in modo uniforme. E la lettura è veloce, mentre la scrittura e soprattutto la cancellazione sono lente. Ecco perché il punteggio migliore del riscaldamento non viene semplicemente scritto nella cartuccia a ogni frame: la flash non è un posto per le variabili.
-Per il docente: Ecco perché il punteggio migliore del riscaldamento non viene semplicemente riscritto nella cartuccia a ogni frame: la flash non è un posto per le variabili.</a:t>
+Per il docente: Ecco perché il punteggio migliore del riscaldamento non viene semplicemente riscritto nella cartuccia a ogni frame: la flash non è un posto per le variabili.
+Immagini: Pair of BIOS chips.jpg, Jud McCranie, CC BY-SA 4.0, Wikimedia Commons.</a:t>
             </a:r>
             <a:endParaRPr lang="en-US" dirty="0"/>
           </a:p>
@@ -3301,7 +3305,63 @@
       </p:sp>
       <p:sp>
         <p:nvSpPr>
-          <p:cNvPr id="12" name="Shape 10"/>
+          <p:cNvPr id="12" name="Text 10"/>
+          <p:cNvSpPr txBox="1"/>
+          <p:nvPr/>
+        </p:nvSpPr>
+        <p:spPr>
+          <a:xfrm>
+            <a:off x="4693615" y="566928"/>
+            <a:ext cx="6949440" cy="640080"/>
+          </a:xfrm>
+          <a:prstGeom prst="rect">
+            <a:avLst/>
+          </a:prstGeom>
+          <a:noFill/>
+          <a:ln/>
+        </p:spPr>
+        <p:txBody>
+          <a:bodyPr wrap="square" lIns="0" tIns="0" rIns="0" bIns="0" rtlCol="0" anchor="t"/>
+          <a:lstStyle/>
+          <a:p>
+            <a:pPr algn="r" indent="0" marL="0">
+              <a:buNone/>
+            </a:pPr>
+            <a:r>
+              <a:rPr lang="en-US" sz="1300" dirty="0">
+                <a:solidFill>
+                  <a:srgbClr val="CFE3EA"/>
+                </a:solidFill>
+                <a:latin typeface="Calibri" pitchFamily="34" charset="0"/>
+                <a:ea typeface="Calibri" pitchFamily="34" charset="-122"/>
+                <a:cs typeface="Calibri" pitchFamily="34" charset="-120"/>
+              </a:rPr>
+              <a:t>Presentazione della lezione. I listati, il programma completo e come provarlo sono nella presentazione del codice:</a:t>
+            </a:r>
+            <a:endParaRPr lang="en-US" sz="1300" dirty="0"/>
+          </a:p>
+          <a:p>
+            <a:pPr algn="r" indent="0" marL="0">
+              <a:buNone/>
+            </a:pPr>
+            <a:r>
+              <a:rPr lang="en-US" sz="1300" dirty="0">
+                <a:solidFill>
+                  <a:srgbClr val="CFE3EA"/>
+                </a:solidFill>
+                <a:latin typeface="Calibri" pitchFamily="34" charset="0"/>
+                <a:ea typeface="Calibri" pitchFamily="34" charset="-122"/>
+                <a:cs typeface="Calibri" pitchFamily="34" charset="-120"/>
+              </a:rPr>
+              <a:t>16-Architettura_dei_Calcolatori-Memoria_Permanente-Codice.pptx</a:t>
+            </a:r>
+            <a:endParaRPr lang="en-US" sz="1300" dirty="0"/>
+          </a:p>
+        </p:txBody>
+      </p:sp>
+      <p:sp>
+        <p:nvSpPr>
+          <p:cNvPr id="13" name="Shape 11"/>
           <p:cNvSpPr/>
           <p:nvPr/>
         </p:nvSpPr>
@@ -3328,7 +3388,7 @@
       </p:sp>
       <p:pic>
         <p:nvPicPr>
-          <p:cNvPr id="13" name="Image 0" descr="/Users/raffaelemontella/devel/riscv-prg32/computer-architecture-with-prg32/tools/assets/game_platformer.png">    </p:cNvPr>
+          <p:cNvPr id="14" name="Image 0" descr="/Users/raffaelemontella/devel/riscv-prg32/computer-architecture-with-prg32/tools/assets/game_platformer.png">    </p:cNvPr>
           <p:cNvPicPr>
             <a:picLocks noChangeAspect="1"/>
           </p:cNvPicPr>
@@ -3882,8 +3942,8 @@
         </p:blipFill>
         <p:spPr>
           <a:xfrm>
-            <a:off x="7863840" y="1676552"/>
-            <a:ext cx="3779215" cy="3779215"/>
+            <a:off x="7863840" y="1918658"/>
+            <a:ext cx="3779215" cy="3295003"/>
           </a:xfrm>
           <a:prstGeom prst="rect">
             <a:avLst/>
@@ -3923,7 +3983,7 @@
                 <a:ea typeface="Calibri" pitchFamily="34" charset="-122"/>
                 <a:cs typeface="Calibri" pitchFamily="34" charset="-120"/>
               </a:rPr>
-              <a:t>Un disco rigido da 6 TB</a:t>
+              <a:t>Un disco rigido aperto: piatto, braccio e testina</a:t>
             </a:r>
             <a:endParaRPr lang="en-US" sz="1200" dirty="0"/>
           </a:p>
@@ -5955,8 +6015,8 @@
         </p:blipFill>
         <p:spPr>
           <a:xfrm>
-            <a:off x="7863840" y="2111162"/>
-            <a:ext cx="3779215" cy="2909996"/>
+            <a:off x="7863840" y="2148954"/>
+            <a:ext cx="3779215" cy="2834411"/>
           </a:xfrm>
           <a:prstGeom prst="rect">
             <a:avLst/>
@@ -5996,7 +6056,7 @@
                 <a:ea typeface="Calibri" pitchFamily="34" charset="-122"/>
                 <a:cs typeface="Calibri" pitchFamily="34" charset="-120"/>
               </a:rPr>
-              <a:t>Pit e land, e la luce che vede il sensore</a:t>
+              <a:t>Pit e land di un CD-ROM stampato, al microscopio elettronico</a:t>
             </a:r>
             <a:endParaRPr lang="en-US" sz="1200" dirty="0"/>
           </a:p>
@@ -6507,8 +6567,8 @@
         </p:blipFill>
         <p:spPr>
           <a:xfrm>
-            <a:off x="7863840" y="2167671"/>
-            <a:ext cx="3779215" cy="2796979"/>
+            <a:off x="7863840" y="2148954"/>
+            <a:ext cx="3779215" cy="2834411"/>
           </a:xfrm>
           <a:prstGeom prst="rect">
             <a:avLst/>
@@ -11780,7 +11840,7 @@
         </p:nvSpPr>
         <p:spPr>
           <a:xfrm>
-            <a:off x="548640" y="2347366"/>
+            <a:off x="548640" y="2298802"/>
             <a:ext cx="402336" cy="402336"/>
           </a:xfrm>
           <a:prstGeom prst="roundRect">
@@ -11827,7 +11887,7 @@
         </p:nvSpPr>
         <p:spPr>
           <a:xfrm>
-            <a:off x="1207008" y="2329078"/>
+            <a:off x="1207008" y="2280514"/>
             <a:ext cx="10436047" cy="438912"/>
           </a:xfrm>
           <a:prstGeom prst="rect">
@@ -11869,7 +11929,7 @@
         </p:nvSpPr>
         <p:spPr>
           <a:xfrm>
-            <a:off x="548640" y="3016301"/>
+            <a:off x="548640" y="2919171"/>
             <a:ext cx="402336" cy="402336"/>
           </a:xfrm>
           <a:prstGeom prst="roundRect">
@@ -11916,7 +11976,7 @@
         </p:nvSpPr>
         <p:spPr>
           <a:xfrm>
-            <a:off x="1207008" y="2998013"/>
+            <a:off x="1207008" y="2900883"/>
             <a:ext cx="10436047" cy="681736"/>
           </a:xfrm>
           <a:prstGeom prst="rect">
@@ -11958,7 +12018,7 @@
         </p:nvSpPr>
         <p:spPr>
           <a:xfrm>
-            <a:off x="548640" y="3928059"/>
+            <a:off x="548640" y="3782365"/>
             <a:ext cx="402336" cy="402336"/>
           </a:xfrm>
           <a:prstGeom prst="roundRect">
@@ -12005,7 +12065,7 @@
         </p:nvSpPr>
         <p:spPr>
           <a:xfrm>
-            <a:off x="1207008" y="3909771"/>
+            <a:off x="1207008" y="3764077"/>
             <a:ext cx="10436047" cy="681736"/>
           </a:xfrm>
           <a:prstGeom prst="rect">
@@ -12047,7 +12107,7 @@
         </p:nvSpPr>
         <p:spPr>
           <a:xfrm>
-            <a:off x="548640" y="4839818"/>
+            <a:off x="548640" y="4645558"/>
             <a:ext cx="402336" cy="402336"/>
           </a:xfrm>
           <a:prstGeom prst="roundRect">
@@ -12094,8 +12154,8 @@
         </p:nvSpPr>
         <p:spPr>
           <a:xfrm>
-            <a:off x="1207008" y="4821530"/>
-            <a:ext cx="10436047" cy="438912"/>
+            <a:off x="1207008" y="4627270"/>
+            <a:ext cx="10436047" cy="681736"/>
           </a:xfrm>
           <a:prstGeom prst="rect">
             <a:avLst/>
@@ -12104,7 +12164,7 @@
           <a:ln/>
         </p:spPr>
         <p:txBody>
-          <a:bodyPr wrap="square" lIns="0" tIns="0" rIns="0" bIns="0" rtlCol="0" anchor="ctr"/>
+          <a:bodyPr wrap="square" lIns="0" tIns="0" rIns="0" bIns="0" rtlCol="0" anchor="t"/>
           <a:lstStyle/>
           <a:p>
             <a:pPr indent="0" marL="0">
@@ -12122,7 +12182,7 @@
                 <a:ea typeface="Calibri" pitchFamily="34" charset="-122"/>
                 <a:cs typeface="Calibri" pitchFamily="34" charset="-120"/>
               </a:rPr>
-              <a:t>Spiegare come un disco ottico memorizza i bit, e confrontare CD e DVD</a:t>
+              <a:t>Spiegare come un disco ottico memorizza i bit, e come si legge un compact disc</a:t>
             </a:r>
             <a:endParaRPr lang="en-US" sz="2200" dirty="0"/>
           </a:p>
@@ -16641,8 +16701,8 @@
         </p:blipFill>
         <p:spPr>
           <a:xfrm>
-            <a:off x="7863840" y="1676552"/>
-            <a:ext cx="3779215" cy="3779215"/>
+            <a:off x="7863840" y="1890610"/>
+            <a:ext cx="3779215" cy="3351101"/>
           </a:xfrm>
           <a:prstGeom prst="rect">
             <a:avLst/>

--- a/it/slides/16-Architettura_dei_Calcolatori-Memoria_Permanente.pptx
+++ b/it/slides/16-Architettura_dei_Calcolatori-Memoria_Permanente.pptx
@@ -126,32 +126,32 @@
   <p:extLst>
     <p:ext uri="{521415D9-36F7-43E2-AB2F-B90AF26B5E84}">
       <p14:sectionLst xmlns:p14="http://schemas.microsoft.com/office/powerpoint/2010/main">
-        <p14:section name="Apertura" id="{05c72963-93bd-4b69-3d1e-3928f0be1ef0}">
+        <p14:section name="Apertura" id="{32a5e229-e23c-fd5f-7510-4dc9f29415f8}">
           <p14:sldIdLst>
             <p14:sldId id="256"/>
             <p14:sldId id="257"/>
           </p14:sldIdLst>
         </p14:section>
-        <p14:section name="I componenti di un calcolatore" id="{0ea5a381-9118-4601-3177-91ff64b96fc0}">
+        <p14:section name="I componenti di un calcolatore" id="{dc0ad700-134a-53a0-e37f-10da8435a12d}">
           <p14:sldIdLst>
             <p14:sldId id="258"/>
             <p14:sldId id="259"/>
           </p14:sldIdLst>
         </p14:section>
-        <p14:section name="Memorie non volatili" id="{d3a4c1dd-02f9-c4a8-9354-fcdfc399e90d}">
+        <p14:section name="Memorie non volatili" id="{da379117-7074-6908-ff1b-ea48b94d1a8d}">
           <p14:sldIdLst>
             <p14:sldId id="260"/>
             <p14:sldId id="261"/>
           </p14:sldIdLst>
         </p14:section>
-        <p14:section name="La cache" id="{f056629f-2edb-63cb-1a71-d63aec4dbf80}">
+        <p14:section name="La cache" id="{6784bb61-8e0b-f696-b7ba-39c51c8d2759}">
           <p14:sldIdLst>
             <p14:sldId id="262"/>
             <p14:sldId id="263"/>
             <p14:sldId id="264"/>
           </p14:sldIdLst>
         </p14:section>
-        <p14:section name="La memoria secondaria" id="{fe922b48-552c-b4f5-e2ee-7dd0f7525a96}">
+        <p14:section name="La memoria secondaria" id="{01df9f52-5106-c23e-7933-041955d48922}">
           <p14:sldIdLst>
             <p14:sldId id="265"/>
             <p14:sldId id="266"/>
@@ -159,13 +159,13 @@
             <p14:sldId id="268"/>
           </p14:sldIdLst>
         </p14:section>
-        <p14:section name="Dischi ottici" id="{85b998b5-6784-28be-ddba-130983962140}">
+        <p14:section name="Dischi ottici" id="{c21b1555-735c-8387-49f0-10b35d983e27}">
           <p14:sldIdLst>
             <p14:sldId id="269"/>
             <p14:sldId id="270"/>
           </p14:sldIdLst>
         </p14:section>
-        <p14:section name="La memoria di massa a più livelli" id="{9a95524f-68cb-571f-9f40-a39ce931a323}">
+        <p14:section name="La memoria di massa a più livelli" id="{8962e7cd-b309-b56a-33ec-1c565d88746e}">
           <p14:sldIdLst>
             <p14:sldId id="271"/>
             <p14:sldId id="272"/>
@@ -579,6 +579,8 @@
             <a:r>
               <a:rPr lang="en-US" dirty="0"/>
               <a:t>La lezione precedente trattava la memoria che dimentica quando manca la corrente. Questa tratta le memorie che non dimenticano: i chip che contengono il firmware, i dischi, i supporti ottici, i nastri. Tra le due colloca la cache, una memoria piccola e veloce che nasconde la lentezza di una grande. La citazione è di un professore di calcolo numerico di questo Ateneo, e ogni studente prima o poi ne impara la verità: un dato non esiste se non è stato salvato.
+Stato di apprendimento: DA COMPRENDERE OGGI, alla fine di questa lezione lo spiegate, lo seguite passo passo e lo applicate da soli; DA UTILIZZARE OGGI, oggi seguite e usate la ricetta; come funziona dentro si spiega più avanti, o non fa parte del corso; DA COMPRENDERE PIÙ AVANTI, riconoscete il nome e lo scopo; lo spiega una lezione successiva. Una slide senza etichetta è contesto: una storia, un esempio, una domanda, un esercizio.
+Stato di apprendimento di questa lezione. DA COMPRENDERE OGGI: ROM, flash, firmware; l'architettura di von Neumann; la cache; la memoria secondaria. DA UTILIZZARE OGGI: il programma completo, gli strumenti di PRG32 (si usa, non si studia, in questo corso). DA COMPRENDERE PIÙ AVANTI: niente. Una slide senza etichetta è contesto: una storia, un esempio, una domanda, un esercizio.
 Per il docente: Spirale: una cartuccia conserva la stringa del titolo dopo uno spegnimento ma perde il punteggio migliore; la lezione spiega dove vive ciascuno, poi tratta ROM e flash, la cache, e la memoria di massa.</a:t>
             </a:r>
             <a:endParaRPr lang="en-US" dirty="0"/>
@@ -668,6 +670,7 @@
             <a:r>
               <a:rPr lang="en-US" dirty="0"/>
               <a:t>Quattro proprietà definiscono le memorie secondarie rispetto alla memoria centrale. Sono non volatili. La loro capacità è di diversi ordini di grandezza maggiore. Il loro costo per bit è di diversi ordini di grandezza minore. E il loro accesso è di alcuni ordini di grandezza più lento. Altri due fatti riguardano l'organizzazione: l'informazione è memorizzata a blocchi, non a byte singoli, e alcuni supporti permettono l'accesso diretto a qualunque blocco mentre altri, come i nastri, solo l'accesso sequenziale.
+DA COMPRENDERE OGGI: la memoria secondaria.
 Per il docente: La memoria secondaria memorizza e conserva tutti i programmi e i dati del calcolatore; la memoria centrale contiene i programmi in esecuzione e i dati che servono loro.
 Immagini: Open hard-drive.jpg, Zzubnik, Public domain, Wikimedia Commons.</a:t>
             </a:r>
@@ -758,6 +761,7 @@
             <a:r>
               <a:rPr lang="en-US" dirty="0"/>
               <a:t>La geometria di un disco magnetico. Piatti rivestiti di materiale magnetizzabile ruotano a velocità costante, e delle testine leggono e scrivono. La superficie è divisa in tracce concentriche e in settori, spicchi come quelli di una torta. Un settore taglia ogni traccia in blocchi, e il blocco, identificato da traccia e settore, è la più piccola unità indirizzabile. La formattazione è l'operazione che traccia questa divisione. L'accesso è diretto: la testina va su qualunque blocco senza passare su tutti i precedenti.
+DA COMPRENDERE OGGI: la memoria secondaria.
 Per il docente: Più settori formano un cluster; le tracce allo stesso raggio su tutti i piatti formano un cilindro. La figura originale è stata ridisegnata.</a:t>
             </a:r>
             <a:endParaRPr lang="en-US" dirty="0"/>
@@ -847,6 +851,7 @@
             <a:r>
               <a:rPr lang="en-US" dirty="0"/>
               <a:t>Il tempo di accesso di un disco è la somma di tre tempi. Tempo di posizionamento: quello per spostare la testina in senso radiale sulla traccia giusta. Latenza: l'attesa che il settore desiderato passi sotto la testina, che dipende dalla velocità di rotazione. Tempo di trasferimento: quello perché il blocco passi sotto la testina. Il totale è questione di millisecondi: un milione di volte più lento della RAM. Nel tempo di un accesso al disco il processore del kit potrebbe eseguire più di centomila istruzioni.
+DA COMPRENDERE OGGI: la memoria secondaria.
 Per il docente: Un millisecondo è un milione di nanosecondi: durante un accesso al disco un processore a 160 MHz potrebbe eseguire più di centomila istruzioni.</a:t>
             </a:r>
             <a:endParaRPr lang="en-US" dirty="0"/>
@@ -936,6 +941,7 @@
             <a:r>
               <a:rPr lang="en-US" dirty="0"/>
               <a:t>Due tecnologie per lo stesso lavoro. Un disco rigido ha piatti magnetici e testine mobili: il suo tempo di accesso è dominato dalla meccanica, ma il costo per terabyte è il più basso, e resta la scelta per grandi archivi e backup. Un disco a stato solido è memoria flash con un controllore e nessuna parte mobile: il suo tempo di accesso è di decine di microsecondi, ed è la memoria di massa standard di portatili e telefoni. È la stessa tecnologia del chip flash del kit.
+DA COMPRENDERE OGGI: la memoria secondaria.
 Per il docente: Novità rispetto alla presentazione originale, che citava gli SSD solo tra i livelli di memoria di massa. Il bus ATA parallelo dei vecchi PC ha ceduto il posto al Serial ATA e poi a NVMe.</a:t>
             </a:r>
             <a:endParaRPr lang="en-US" dirty="0"/>
@@ -1025,6 +1031,7 @@
             <a:r>
               <a:rPr lang="en-US" dirty="0"/>
               <a:t>Un disco ottico è letto da un raggio laser la cui riflessione cambia tra le cavità, i pit, e la superficie piana, il land. Il punto che all'esame viene sempre chiesto: 0 e 1 non sono pit e land. Un 1 è un cambiamento, da pit a land o da land a pit; uno 0 è nessun cambiamento. Questi dischi di solito si scrivono una volta sola, perché la modifica fisica è irreversibile, e questo li rende adatti a distribuire programmi e ad archivi che non devono essere alterati.
+DA COMPRENDERE OGGI: la memoria secondaria.
 Per il docente: Codificare un 1 come transizione è un'idea autosincronizzante, usata anche in molti collegamenti seriali.
 Immagini: CD-ROM pressed pits.jpg, Tycho, CC0, Wikimedia Commons.</a:t>
             </a:r>
@@ -1115,6 +1122,7 @@
             <a:r>
               <a:rPr lang="en-US" dirty="0"/>
               <a:t>In un compact disc l'informazione sta su un'unica traccia a spirale, con una distanza di 1,6 micrometri tra una spira e la successiva. La densità di registrazione è costante lungo la spirale, quindi per leggere a ritmo costante il disco deve girare più in fretta vicino al centro e più lentamente vicino al bordo: è la velocità lineare costante. L'alternativa, la velocità angolare costante, tiene costante la rotazione e spreca la parte esterna del disco. La velocità fu fissata in origine dalle esigenze della musica.
+DA COMPRENDERE OGGI: la memoria secondaria.
 Per il docente: 1x = 1,2 m/s. CD registrabile: due strati di policarbonato racchiudono un sottile foglio riflettente coperto da un colorante traslucido.
 Immagini: CD Player focusing lens assembly.jpg, Zim 256, CC BY-SA 3.0, Wikimedia Commons.</a:t>
             </a:r>
@@ -1205,6 +1213,7 @@
             <a:r>
               <a:rPr lang="en-US" dirty="0"/>
               <a:t>Cinque livelli di memoria permanente, dal più veloce al più economico: un RAM disk, che è un pezzo di memoria centrale usato come disco; i dischi a stato solido; i dischi rigidi; le librerie di dischi, in cui alcuni dischi sono accesi solo quando servono; e le librerie a nastri, in cui dei robot montano i nastri. Il sistema sposta i dati in automatico: ciò che si usa spesso migra verso i livelli veloci, il resto scende verso quelli economici. È l'idea della cache, applicata alla memoria di massa.
+DA COMPRENDERE OGGI: la memoria secondaria.
 Per il docente: La stessa idea della cache, applicata alla memoria di massa. Lo storage HPC del Dipartimento funziona così (visita alla fine del corso).</a:t>
             </a:r>
             <a:endParaRPr lang="en-US" dirty="0"/>
@@ -1652,6 +1661,7 @@
             <a:r>
               <a:rPr lang="en-US" dirty="0"/>
               <a:t>Cinque conclusioni. Le memorie non volatili contengono di solito il firmware, il software di base di una macchina. La cache migliora le prestazioni tenendo vicino al processore una copia di parte della memoria centrale. La stessa idea, un livello piccolo e veloce davanti a uno grande e lento, si riusa nella memoria di massa. Le memorie permanenti possono essere a semiconduttore, magnetiche o ottiche. E un sistema moderno ha più livelli, gestiti in automatico. Ora viene la Parte 3 di Verm1, che usa la memoria come finora nel progetto non era mai stata usata.
+Stato di apprendimento, riepilogo. DA COMPRENDERE OGGI: ROM, flash, firmware; l'architettura di von Neumann; la cache; la memoria secondaria. DA UTILIZZARE OGGI: il programma completo, gli strumenti di PRG32 (si usa, non si studia, in questo corso). DA COMPRENDERE PIÙ AVANTI: niente. Una slide senza etichetta è contesto: una storia, un esempio, una domanda, un esercizio.
 Per il docente: A seguire: Verm1, parte 3: un corpo, regole e stati. Poi il processore.</a:t>
             </a:r>
             <a:endParaRPr lang="en-US" dirty="0"/>
@@ -1740,7 +1750,8 @@
           <a:p>
             <a:r>
               <a:rPr lang="en-US" dirty="0"/>
-              <a:t>Sei riquadri: il processore, la memoria centrale, la memoria secondaria, i dispositivi di ingresso e uscita, le linee di comunicazione, e un'osservazione sul contenitore. Ogni riquadro nomina l'unità e poi dice dove sta sul kit: il core RISC-V, i 512 KB di SRAM, il chip flash, il display con joystick e amplificatore. L'ultimo riquadro è la differenza tra un PC e un microcontrollore: il primo distribuisce le unità su una scheda madre, il secondo le mette quasi tutte in un solo contenitore.</a:t>
+              <a:t>Sei riquadri: il processore, la memoria centrale, la memoria secondaria, i dispositivi di ingresso e uscita, le linee di comunicazione, e un'osservazione sul contenitore. Ogni riquadro nomina l'unità e poi dice dove sta sul kit: il core RISC-V, i 512 KB di SRAM, il chip flash, il display con joystick e amplificatore. L'ultimo riquadro è la differenza tra un PC e un microcontrollore: il primo distribuisce le unità su una scheda madre, il secondo le mette quasi tutte in un solo contenitore.
+DA COMPRENDERE OGGI: l'architettura di von Neumann.</a:t>
             </a:r>
             <a:endParaRPr lang="en-US" dirty="0"/>
           </a:p>
@@ -1829,6 +1840,7 @@
             <a:r>
               <a:rPr lang="en-US" dirty="0"/>
               <a:t>Il firmware è il software di base conservato in una memoria non volatile. In un PC si chiamava BIOS e faceva quattro lavori: provare i dispositivi all'accensione, configurarli, avviare il sistema operativo, e offrire funzioni di base per tastiera e dischi; oggi il suo erede si chiama UEFI. Il kit ha una catena simile: un piccolo programma in ROM lancia un bootloader in flash, che lancia il firmware PRG32, che carica la cartuccia scelta. Ogni stadio trova, controlla e avvia il successivo.
+DA COMPRENDERE OGGI: ROM, flash, firmware.
 Per il docente: Ogni stadio trova, controlla e avvia il successivo: una catena che termina con la prima istruzione di first_init.</a:t>
             </a:r>
             <a:endParaRPr lang="en-US" dirty="0"/>
@@ -1918,6 +1930,7 @@
             <a:r>
               <a:rPr lang="en-US" dirty="0"/>
               <a:t>Leggete la tabella dall'alto in basso come una storia della comodità. Una ROM è scritta dal costruttore una volta per tutte. Una PROM può essere scritta dall'utente, una volta. Una EPROM si può cancellare, tutta insieme, esponendola alla luce ultravioletta attraverso una finestrella, e riscrivere. Una EEPROM si cancella elettricamente, un byte alla volta, senza rimuoverla. La flash si cancella elettricamente a blocchi: meno flessibile della EEPROM, ma molto più economica, e oggi è ovunque.
+DA COMPRENDERE OGGI: ROM, flash, firmware.
 Per il docente: Read-only memory, memoria di sola lettura; programmable ROM; erasable PROM; electrically erasable PROM. Tempo di accesso dell'ordine dei nanosecondi in lettura. EEPROM e flash sono più lente e, per bit, erano un tempo più care della RAM; la flash è oggi la memoria a semiconduttore più economica.</a:t>
             </a:r>
             <a:endParaRPr lang="en-US" dirty="0"/>
@@ -2007,6 +2020,7 @@
             <a:r>
               <a:rPr lang="en-US" dirty="0"/>
               <a:t>Tre proprietà della flash spiegano come la si usa. Si cancella a blocchi, non a byte singoli: cancellare porta a 1 tutti i bit di un blocco, e scrivere può solo trasformare degli 1 in 0. Ogni blocco sopporta un numero limitato di cancellazioni, quindi un controllore distribuisce le scritture in modo uniforme. E la lettura è veloce, mentre la scrittura e soprattutto la cancellazione sono lente. Ecco perché il punteggio migliore del riscaldamento non viene semplicemente scritto nella cartuccia a ogni frame: la flash non è un posto per le variabili.
+DA COMPRENDERE OGGI: ROM, flash, firmware.
 Per il docente: Ecco perché il punteggio migliore del riscaldamento non viene semplicemente riscritto nella cartuccia a ogni frame: la flash non è un posto per le variabili.
 Immagini: Pair of BIOS chips.jpg, Jud McCranie, CC BY-SA 4.0, Wikimedia Commons.</a:t>
             </a:r>
@@ -2097,6 +2111,7 @@
             <a:r>
               <a:rPr lang="en-US" dirty="0"/>
               <a:t>Mentre la memoria viene letta o scritta il processore aspetta, e più la memoria è lenta più cicli di clock si perdono. Perché non fare tutta la memoria veloce quanto i registri? Perché dovrebbe stare sullo stesso chip del processore, e allora non potrebbe essere grande. Il compromesso: una memoria piccola e veloce sul chip del processore, e una più grande e più lenta raggiunta attraverso il bus.
+DA COMPRENDERE OGGI: la cache.
 Per il docente: La domanda della slide originale: perché non costruire memorie veloci quanto i registri della CPU?</a:t>
             </a:r>
             <a:endParaRPr lang="en-US" dirty="0"/>
@@ -2186,6 +2201,7 @@
             <a:r>
               <a:rPr lang="en-US" dirty="0"/>
               <a:t>La cache sta tra il processore e la memoria centrale. A ogni accesso il processore guarda prima nella cache. Se il contenuto dell'indirizzo richiesto c'è, è un hit e il dato arriva subito. Se non c'è, è un miss: il dato viene copiato dalla memoria centrale nella cache, insieme a un certo numero di locazioni vicine. La scommessa che sta dietro è il principio di località: un programma che ha appena usato un indirizzo probabilmente userà di nuovo presto quello, o i suoi vicini. La ragione sono i cicli e i vettori.
+DA COMPRENDERE OGGI: la cache.
 Per il docente: Il principio di località: un programma che ha appena usato un indirizzo probabilmente lo userà di nuovo presto (località temporale) e probabilmente userà i suoi vicini (località spaziale). La ragione sono i cicli e i vettori.</a:t>
             </a:r>
             <a:endParaRPr lang="en-US" dirty="0"/>
@@ -2275,6 +2291,7 @@
             <a:r>
               <a:rPr lang="en-US" dirty="0"/>
               <a:t>Numeri tipici. Un PC ha più livelli di cache: un primo livello di decine di kilobyte dentro ogni core, un secondo di centinaia di kilobyte, e un terzo di megabyte condiviso dai core. L'ultima colonna è il kit: nessuna cache davanti alla sua SRAM, perché quella memoria è già veloce quanto serve al core; solo la flash esterna si legge attraverso una piccola cache. Il confronto fra le tre colonne mostra anche quanto sono cresciute memoria centrale e memoria di massa in vent'anni.
+DA COMPRENDERE OGGI: la cache.
 Per il docente: Primo livello (interno): mantiene un flusso continuo dentro il processore. Secondo livello: limita il rallentamento dovuto alla memoria centrale. Terzo livello (da 8 a 32 MB e oltre): condiviso dai core dello stesso processore. Le cache sono fatte di SRAM. Sull'ESP32-C6 la SRAM è già veloce quanto serve al core; solo la flash esterna sta dietro una cache.</a:t>
             </a:r>
             <a:endParaRPr lang="en-US" dirty="0"/>
@@ -3412,6 +3429,420 @@
       </p:pic>
       <p:sp>
         <p:nvSpPr>
+          <p:cNvPr id="15" name="Shape 12"/>
+          <p:cNvSpPr/>
+          <p:nvPr/>
+        </p:nvSpPr>
+        <p:spPr>
+          <a:xfrm>
+            <a:off x="8910777" y="91440"/>
+            <a:ext cx="2732278" cy="274320"/>
+          </a:xfrm>
+          <a:prstGeom prst="rect">
+            <a:avLst/>
+          </a:prstGeom>
+          <a:solidFill>
+            <a:srgbClr val="F3E8FF"/>
+          </a:solidFill>
+          <a:ln w="12700">
+            <a:solidFill>
+              <a:srgbClr val="7E22CE"/>
+            </a:solidFill>
+            <a:prstDash val="dash"/>
+          </a:ln>
+        </p:spPr>
+      </p:sp>
+      <p:sp>
+        <p:nvSpPr>
+          <p:cNvPr id="16" name="Shape 13"/>
+          <p:cNvSpPr/>
+          <p:nvPr/>
+        </p:nvSpPr>
+        <p:spPr>
+          <a:xfrm>
+            <a:off x="8938209" y="128016"/>
+            <a:ext cx="45720" cy="45720"/>
+          </a:xfrm>
+          <a:prstGeom prst="rect">
+            <a:avLst/>
+          </a:prstGeom>
+          <a:solidFill>
+            <a:srgbClr val="7E22CE"/>
+          </a:solidFill>
+          <a:ln w="12700">
+            <a:solidFill>
+              <a:srgbClr val="7E22CE"/>
+            </a:solidFill>
+            <a:prstDash val="solid"/>
+          </a:ln>
+        </p:spPr>
+      </p:sp>
+      <p:sp>
+        <p:nvSpPr>
+          <p:cNvPr id="17" name="Shape 14"/>
+          <p:cNvSpPr/>
+          <p:nvPr/>
+        </p:nvSpPr>
+        <p:spPr>
+          <a:xfrm>
+            <a:off x="8938209" y="205740"/>
+            <a:ext cx="45720" cy="45720"/>
+          </a:xfrm>
+          <a:prstGeom prst="rect">
+            <a:avLst/>
+          </a:prstGeom>
+          <a:solidFill>
+            <a:srgbClr val="7E22CE"/>
+          </a:solidFill>
+          <a:ln w="12700">
+            <a:solidFill>
+              <a:srgbClr val="7E22CE"/>
+            </a:solidFill>
+            <a:prstDash val="solid"/>
+          </a:ln>
+        </p:spPr>
+      </p:sp>
+      <p:sp>
+        <p:nvSpPr>
+          <p:cNvPr id="18" name="Shape 15"/>
+          <p:cNvSpPr/>
+          <p:nvPr/>
+        </p:nvSpPr>
+        <p:spPr>
+          <a:xfrm>
+            <a:off x="8938209" y="283464"/>
+            <a:ext cx="45720" cy="45720"/>
+          </a:xfrm>
+          <a:prstGeom prst="rect">
+            <a:avLst/>
+          </a:prstGeom>
+          <a:solidFill>
+            <a:srgbClr val="7E22CE"/>
+          </a:solidFill>
+          <a:ln w="12700">
+            <a:solidFill>
+              <a:srgbClr val="7E22CE"/>
+            </a:solidFill>
+            <a:prstDash val="solid"/>
+          </a:ln>
+        </p:spPr>
+      </p:sp>
+      <p:pic>
+        <p:nvPicPr>
+          <p:cNvPr id="19" name="Image 1" descr="preencoded.png">    </p:cNvPr>
+          <p:cNvPicPr>
+            <a:picLocks noChangeAspect="1"/>
+          </p:cNvPicPr>
+          <p:nvPr/>
+        </p:nvPicPr>
+        <p:blipFill>
+          <a:blip r:embed="rId2"/>
+          <a:stretch>
+            <a:fillRect/>
+          </a:stretch>
+        </p:blipFill>
+        <p:spPr>
+          <a:xfrm>
+            <a:off x="9038793" y="128016"/>
+            <a:ext cx="201168" cy="201168"/>
+          </a:xfrm>
+          <a:prstGeom prst="rect">
+            <a:avLst/>
+          </a:prstGeom>
+        </p:spPr>
+      </p:pic>
+      <p:sp>
+        <p:nvSpPr>
+          <p:cNvPr id="20" name="Text 16"/>
+          <p:cNvSpPr txBox="1"/>
+          <p:nvPr/>
+        </p:nvSpPr>
+        <p:spPr>
+          <a:xfrm>
+            <a:off x="9294825" y="91440"/>
+            <a:ext cx="2311654" cy="274320"/>
+          </a:xfrm>
+          <a:prstGeom prst="rect">
+            <a:avLst/>
+          </a:prstGeom>
+          <a:noFill/>
+          <a:ln/>
+        </p:spPr>
+        <p:txBody>
+          <a:bodyPr wrap="square" lIns="0" tIns="0" rIns="0" bIns="0" rtlCol="0" anchor="ctr"/>
+          <a:lstStyle/>
+          <a:p>
+            <a:pPr indent="0" marL="0">
+              <a:buNone/>
+            </a:pPr>
+            <a:r>
+              <a:rPr lang="en-US" sz="1100" b="1" dirty="0">
+                <a:solidFill>
+                  <a:srgbClr val="6B21A8"/>
+                </a:solidFill>
+                <a:latin typeface="Calibri" pitchFamily="34" charset="0"/>
+                <a:ea typeface="Calibri" pitchFamily="34" charset="-122"/>
+                <a:cs typeface="Calibri" pitchFamily="34" charset="-120"/>
+              </a:rPr>
+              <a:t>DA COMPRENDERE PIÙ AVANTI</a:t>
+            </a:r>
+            <a:endParaRPr lang="en-US" sz="1100" dirty="0"/>
+          </a:p>
+        </p:txBody>
+      </p:sp>
+      <p:sp>
+        <p:nvSpPr>
+          <p:cNvPr id="21" name="Shape 17"/>
+          <p:cNvSpPr/>
+          <p:nvPr/>
+        </p:nvSpPr>
+        <p:spPr>
+          <a:xfrm>
+            <a:off x="6675069" y="91440"/>
+            <a:ext cx="2125980" cy="274320"/>
+          </a:xfrm>
+          <a:prstGeom prst="rect">
+            <a:avLst/>
+          </a:prstGeom>
+          <a:solidFill>
+            <a:srgbClr val="FEF3C7"/>
+          </a:solidFill>
+          <a:ln w="12700">
+            <a:solidFill>
+              <a:srgbClr val="B45309"/>
+            </a:solidFill>
+            <a:prstDash val="solid"/>
+          </a:ln>
+        </p:spPr>
+      </p:sp>
+      <p:sp>
+        <p:nvSpPr>
+          <p:cNvPr id="22" name="Shape 18"/>
+          <p:cNvSpPr/>
+          <p:nvPr/>
+        </p:nvSpPr>
+        <p:spPr>
+          <a:xfrm>
+            <a:off x="6675069" y="91440"/>
+            <a:ext cx="27432" cy="274320"/>
+          </a:xfrm>
+          <a:prstGeom prst="rect">
+            <a:avLst/>
+          </a:prstGeom>
+          <a:solidFill>
+            <a:srgbClr val="B45309"/>
+          </a:solidFill>
+          <a:ln w="12700">
+            <a:solidFill>
+              <a:srgbClr val="B45309"/>
+            </a:solidFill>
+            <a:prstDash val="solid"/>
+          </a:ln>
+        </p:spPr>
+      </p:sp>
+      <p:sp>
+        <p:nvSpPr>
+          <p:cNvPr id="23" name="Shape 19"/>
+          <p:cNvSpPr/>
+          <p:nvPr/>
+        </p:nvSpPr>
+        <p:spPr>
+          <a:xfrm>
+            <a:off x="6729933" y="91440"/>
+            <a:ext cx="27432" cy="274320"/>
+          </a:xfrm>
+          <a:prstGeom prst="rect">
+            <a:avLst/>
+          </a:prstGeom>
+          <a:solidFill>
+            <a:srgbClr val="B45309"/>
+          </a:solidFill>
+          <a:ln w="12700">
+            <a:solidFill>
+              <a:srgbClr val="B45309"/>
+            </a:solidFill>
+            <a:prstDash val="solid"/>
+          </a:ln>
+        </p:spPr>
+      </p:sp>
+      <p:pic>
+        <p:nvPicPr>
+          <p:cNvPr id="24" name="Image 2" descr="preencoded.png">    </p:cNvPr>
+          <p:cNvPicPr>
+            <a:picLocks noChangeAspect="1"/>
+          </p:cNvPicPr>
+          <p:nvPr/>
+        </p:nvPicPr>
+        <p:blipFill>
+          <a:blip r:embed="rId3"/>
+          <a:stretch>
+            <a:fillRect/>
+          </a:stretch>
+        </p:blipFill>
+        <p:spPr>
+          <a:xfrm>
+            <a:off x="6803085" y="128016"/>
+            <a:ext cx="201168" cy="201168"/>
+          </a:xfrm>
+          <a:prstGeom prst="rect">
+            <a:avLst/>
+          </a:prstGeom>
+        </p:spPr>
+      </p:pic>
+      <p:sp>
+        <p:nvSpPr>
+          <p:cNvPr id="25" name="Text 20"/>
+          <p:cNvSpPr txBox="1"/>
+          <p:nvPr/>
+        </p:nvSpPr>
+        <p:spPr>
+          <a:xfrm>
+            <a:off x="7059117" y="91440"/>
+            <a:ext cx="1705356" cy="274320"/>
+          </a:xfrm>
+          <a:prstGeom prst="rect">
+            <a:avLst/>
+          </a:prstGeom>
+          <a:noFill/>
+          <a:ln/>
+        </p:spPr>
+        <p:txBody>
+          <a:bodyPr wrap="square" lIns="0" tIns="0" rIns="0" bIns="0" rtlCol="0" anchor="ctr"/>
+          <a:lstStyle/>
+          <a:p>
+            <a:pPr indent="0" marL="0">
+              <a:buNone/>
+            </a:pPr>
+            <a:r>
+              <a:rPr lang="en-US" sz="1100" b="1" dirty="0">
+                <a:solidFill>
+                  <a:srgbClr val="92400E"/>
+                </a:solidFill>
+                <a:latin typeface="Calibri" pitchFamily="34" charset="0"/>
+                <a:ea typeface="Calibri" pitchFamily="34" charset="-122"/>
+                <a:cs typeface="Calibri" pitchFamily="34" charset="-120"/>
+              </a:rPr>
+              <a:t>DA UTILIZZARE OGGI</a:t>
+            </a:r>
+            <a:endParaRPr lang="en-US" sz="1100" dirty="0"/>
+          </a:p>
+        </p:txBody>
+      </p:sp>
+      <p:sp>
+        <p:nvSpPr>
+          <p:cNvPr id="26" name="Shape 21"/>
+          <p:cNvSpPr/>
+          <p:nvPr/>
+        </p:nvSpPr>
+        <p:spPr>
+          <a:xfrm>
+            <a:off x="4352747" y="91440"/>
+            <a:ext cx="2212594" cy="274320"/>
+          </a:xfrm>
+          <a:prstGeom prst="rect">
+            <a:avLst/>
+          </a:prstGeom>
+          <a:solidFill>
+            <a:srgbClr val="E0F2FE"/>
+          </a:solidFill>
+          <a:ln w="12700">
+            <a:solidFill>
+              <a:srgbClr val="0369A1"/>
+            </a:solidFill>
+            <a:prstDash val="solid"/>
+          </a:ln>
+        </p:spPr>
+      </p:sp>
+      <p:sp>
+        <p:nvSpPr>
+          <p:cNvPr id="27" name="Shape 22"/>
+          <p:cNvSpPr/>
+          <p:nvPr/>
+        </p:nvSpPr>
+        <p:spPr>
+          <a:xfrm>
+            <a:off x="4352747" y="91440"/>
+            <a:ext cx="73152" cy="274320"/>
+          </a:xfrm>
+          <a:prstGeom prst="rect">
+            <a:avLst/>
+          </a:prstGeom>
+          <a:solidFill>
+            <a:srgbClr val="0369A1"/>
+          </a:solidFill>
+          <a:ln w="12700">
+            <a:solidFill>
+              <a:srgbClr val="0369A1"/>
+            </a:solidFill>
+            <a:prstDash val="solid"/>
+          </a:ln>
+        </p:spPr>
+      </p:sp>
+      <p:pic>
+        <p:nvPicPr>
+          <p:cNvPr id="28" name="Image 3" descr="preencoded.png">    </p:cNvPr>
+          <p:cNvPicPr>
+            <a:picLocks noChangeAspect="1"/>
+          </p:cNvPicPr>
+          <p:nvPr/>
+        </p:nvPicPr>
+        <p:blipFill>
+          <a:blip r:embed="rId4"/>
+          <a:stretch>
+            <a:fillRect/>
+          </a:stretch>
+        </p:blipFill>
+        <p:spPr>
+          <a:xfrm>
+            <a:off x="4480763" y="128016"/>
+            <a:ext cx="201168" cy="201168"/>
+          </a:xfrm>
+          <a:prstGeom prst="rect">
+            <a:avLst/>
+          </a:prstGeom>
+        </p:spPr>
+      </p:pic>
+      <p:sp>
+        <p:nvSpPr>
+          <p:cNvPr id="29" name="Text 23"/>
+          <p:cNvSpPr txBox="1"/>
+          <p:nvPr/>
+        </p:nvSpPr>
+        <p:spPr>
+          <a:xfrm>
+            <a:off x="4736795" y="91440"/>
+            <a:ext cx="1791970" cy="274320"/>
+          </a:xfrm>
+          <a:prstGeom prst="rect">
+            <a:avLst/>
+          </a:prstGeom>
+          <a:noFill/>
+          <a:ln/>
+        </p:spPr>
+        <p:txBody>
+          <a:bodyPr wrap="square" lIns="0" tIns="0" rIns="0" bIns="0" rtlCol="0" anchor="ctr"/>
+          <a:lstStyle/>
+          <a:p>
+            <a:pPr indent="0" marL="0">
+              <a:buNone/>
+            </a:pPr>
+            <a:r>
+              <a:rPr lang="en-US" sz="1100" b="1" dirty="0">
+                <a:solidFill>
+                  <a:srgbClr val="075985"/>
+                </a:solidFill>
+                <a:latin typeface="Calibri" pitchFamily="34" charset="0"/>
+                <a:ea typeface="Calibri" pitchFamily="34" charset="-122"/>
+                <a:cs typeface="Calibri" pitchFamily="34" charset="-120"/>
+              </a:rPr>
+              <a:t>DA COMPRENDERE OGGI</a:t>
+            </a:r>
+            <a:endParaRPr lang="en-US" sz="1100" dirty="0"/>
+          </a:p>
+        </p:txBody>
+      </p:sp>
+      <p:sp>
+        <p:nvSpPr>
           <p:cNvPr id="25" name="Slide Number Placeholder 0"/>
           <p:cNvSpPr>
             <a:spLocks noGrp="1"/>
@@ -3991,6 +4422,133 @@
       </p:sp>
       <p:sp>
         <p:nvSpPr>
+          <p:cNvPr id="17" name="Shape 14"/>
+          <p:cNvSpPr/>
+          <p:nvPr/>
+        </p:nvSpPr>
+        <p:spPr>
+          <a:xfrm>
+            <a:off x="7854645" y="91440"/>
+            <a:ext cx="3788410" cy="274320"/>
+          </a:xfrm>
+          <a:prstGeom prst="rect">
+            <a:avLst/>
+          </a:prstGeom>
+          <a:solidFill>
+            <a:srgbClr val="E0F2FE"/>
+          </a:solidFill>
+          <a:ln w="12700">
+            <a:solidFill>
+              <a:srgbClr val="0369A1"/>
+            </a:solidFill>
+            <a:prstDash val="solid"/>
+          </a:ln>
+        </p:spPr>
+      </p:sp>
+      <p:sp>
+        <p:nvSpPr>
+          <p:cNvPr id="18" name="Shape 15"/>
+          <p:cNvSpPr/>
+          <p:nvPr/>
+        </p:nvSpPr>
+        <p:spPr>
+          <a:xfrm>
+            <a:off x="7854645" y="91440"/>
+            <a:ext cx="73152" cy="274320"/>
+          </a:xfrm>
+          <a:prstGeom prst="rect">
+            <a:avLst/>
+          </a:prstGeom>
+          <a:solidFill>
+            <a:srgbClr val="0369A1"/>
+          </a:solidFill>
+          <a:ln w="12700">
+            <a:solidFill>
+              <a:srgbClr val="0369A1"/>
+            </a:solidFill>
+            <a:prstDash val="solid"/>
+          </a:ln>
+        </p:spPr>
+      </p:sp>
+      <p:pic>
+        <p:nvPicPr>
+          <p:cNvPr id="19" name="Image 1" descr="preencoded.png">    </p:cNvPr>
+          <p:cNvPicPr>
+            <a:picLocks noChangeAspect="1"/>
+          </p:cNvPicPr>
+          <p:nvPr/>
+        </p:nvPicPr>
+        <p:blipFill>
+          <a:blip r:embed="rId2"/>
+          <a:stretch>
+            <a:fillRect/>
+          </a:stretch>
+        </p:blipFill>
+        <p:spPr>
+          <a:xfrm>
+            <a:off x="7982661" y="128016"/>
+            <a:ext cx="201168" cy="201168"/>
+          </a:xfrm>
+          <a:prstGeom prst="rect">
+            <a:avLst/>
+          </a:prstGeom>
+        </p:spPr>
+      </p:pic>
+      <p:sp>
+        <p:nvSpPr>
+          <p:cNvPr id="20" name="Text 16"/>
+          <p:cNvSpPr txBox="1"/>
+          <p:nvPr/>
+        </p:nvSpPr>
+        <p:spPr>
+          <a:xfrm>
+            <a:off x="8238693" y="91440"/>
+            <a:ext cx="3367786" cy="274320"/>
+          </a:xfrm>
+          <a:prstGeom prst="rect">
+            <a:avLst/>
+          </a:prstGeom>
+          <a:noFill/>
+          <a:ln/>
+        </p:spPr>
+        <p:txBody>
+          <a:bodyPr wrap="square" lIns="0" tIns="0" rIns="0" bIns="0" rtlCol="0" anchor="ctr"/>
+          <a:lstStyle/>
+          <a:p>
+            <a:pPr indent="0" marL="0">
+              <a:buNone/>
+            </a:pPr>
+            <a:r>
+              <a:rPr lang="en-US" sz="1100" b="1" dirty="0">
+                <a:solidFill>
+                  <a:srgbClr val="075985"/>
+                </a:solidFill>
+                <a:latin typeface="Calibri" pitchFamily="34" charset="0"/>
+                <a:ea typeface="Calibri" pitchFamily="34" charset="-122"/>
+                <a:cs typeface="Calibri" pitchFamily="34" charset="-120"/>
+              </a:rPr>
+              <a:t>DA COMPRENDERE OGGI</a:t>
+            </a:r>
+            <a:pPr indent="0" marL="0">
+              <a:buNone/>
+            </a:pPr>
+            <a:r>
+              <a:rPr lang="en-US" sz="1100" dirty="0">
+                <a:solidFill>
+                  <a:srgbClr val="075985"/>
+                </a:solidFill>
+                <a:latin typeface="Calibri" pitchFamily="34" charset="0"/>
+                <a:ea typeface="Calibri" pitchFamily="34" charset="-122"/>
+                <a:cs typeface="Calibri" pitchFamily="34" charset="-120"/>
+              </a:rPr>
+              <a:t> · la memoria secondaria</a:t>
+            </a:r>
+            <a:endParaRPr lang="en-US" sz="1100" dirty="0"/>
+          </a:p>
+        </p:txBody>
+      </p:sp>
+      <p:sp>
+        <p:nvSpPr>
           <p:cNvPr id="25" name="Slide Number Placeholder 0"/>
           <p:cNvSpPr>
             <a:spLocks noGrp="1"/>
@@ -4130,9 +4688,59 @@
           </a:ln>
         </p:spPr>
       </p:sp>
+      <p:sp>
+        <p:nvSpPr>
+          <p:cNvPr id="4" name="Shape 2"/>
+          <p:cNvSpPr/>
+          <p:nvPr/>
+        </p:nvSpPr>
+        <p:spPr>
+          <a:xfrm>
+            <a:off x="7854645" y="91440"/>
+            <a:ext cx="3788410" cy="274320"/>
+          </a:xfrm>
+          <a:prstGeom prst="rect">
+            <a:avLst/>
+          </a:prstGeom>
+          <a:solidFill>
+            <a:srgbClr val="E0F2FE"/>
+          </a:solidFill>
+          <a:ln w="12700">
+            <a:solidFill>
+              <a:srgbClr val="0369A1"/>
+            </a:solidFill>
+            <a:prstDash val="solid"/>
+          </a:ln>
+        </p:spPr>
+      </p:sp>
+      <p:sp>
+        <p:nvSpPr>
+          <p:cNvPr id="5" name="Shape 3"/>
+          <p:cNvSpPr/>
+          <p:nvPr/>
+        </p:nvSpPr>
+        <p:spPr>
+          <a:xfrm>
+            <a:off x="7854645" y="91440"/>
+            <a:ext cx="73152" cy="274320"/>
+          </a:xfrm>
+          <a:prstGeom prst="rect">
+            <a:avLst/>
+          </a:prstGeom>
+          <a:solidFill>
+            <a:srgbClr val="0369A1"/>
+          </a:solidFill>
+          <a:ln w="12700">
+            <a:solidFill>
+              <a:srgbClr val="0369A1"/>
+            </a:solidFill>
+            <a:prstDash val="solid"/>
+          </a:ln>
+        </p:spPr>
+      </p:sp>
       <p:pic>
         <p:nvPicPr>
-          <p:cNvPr id="5" name="Image 0" descr="preencoded.png">    </p:cNvPr>
+          <p:cNvPr id="6" name="Image 0" descr="preencoded.png">    </p:cNvPr>
           <p:cNvPicPr>
             <a:picLocks noChangeAspect="1"/>
           </p:cNvPicPr>
@@ -4146,6 +4754,83 @@
         </p:blipFill>
         <p:spPr>
           <a:xfrm>
+            <a:off x="7982661" y="128016"/>
+            <a:ext cx="201168" cy="201168"/>
+          </a:xfrm>
+          <a:prstGeom prst="rect">
+            <a:avLst/>
+          </a:prstGeom>
+        </p:spPr>
+      </p:pic>
+      <p:sp>
+        <p:nvSpPr>
+          <p:cNvPr id="7" name="Text 4"/>
+          <p:cNvSpPr txBox="1"/>
+          <p:nvPr/>
+        </p:nvSpPr>
+        <p:spPr>
+          <a:xfrm>
+            <a:off x="8238693" y="91440"/>
+            <a:ext cx="3367786" cy="274320"/>
+          </a:xfrm>
+          <a:prstGeom prst="rect">
+            <a:avLst/>
+          </a:prstGeom>
+          <a:noFill/>
+          <a:ln/>
+        </p:spPr>
+        <p:txBody>
+          <a:bodyPr wrap="square" lIns="0" tIns="0" rIns="0" bIns="0" rtlCol="0" anchor="ctr"/>
+          <a:lstStyle/>
+          <a:p>
+            <a:pPr indent="0" marL="0">
+              <a:buNone/>
+            </a:pPr>
+            <a:r>
+              <a:rPr lang="en-US" sz="1100" b="1" dirty="0">
+                <a:solidFill>
+                  <a:srgbClr val="075985"/>
+                </a:solidFill>
+                <a:latin typeface="Calibri" pitchFamily="34" charset="0"/>
+                <a:ea typeface="Calibri" pitchFamily="34" charset="-122"/>
+                <a:cs typeface="Calibri" pitchFamily="34" charset="-120"/>
+              </a:rPr>
+              <a:t>DA COMPRENDERE OGGI</a:t>
+            </a:r>
+            <a:pPr indent="0" marL="0">
+              <a:buNone/>
+            </a:pPr>
+            <a:r>
+              <a:rPr lang="en-US" sz="1100" dirty="0">
+                <a:solidFill>
+                  <a:srgbClr val="075985"/>
+                </a:solidFill>
+                <a:latin typeface="Calibri" pitchFamily="34" charset="0"/>
+                <a:ea typeface="Calibri" pitchFamily="34" charset="-122"/>
+                <a:cs typeface="Calibri" pitchFamily="34" charset="-120"/>
+              </a:rPr>
+              <a:t> · la memoria secondaria</a:t>
+            </a:r>
+            <a:endParaRPr lang="en-US" sz="1100" dirty="0"/>
+          </a:p>
+        </p:txBody>
+      </p:sp>
+      <p:pic>
+        <p:nvPicPr>
+          <p:cNvPr id="9" name="Image 1" descr="preencoded.png">    </p:cNvPr>
+          <p:cNvPicPr>
+            <a:picLocks noChangeAspect="1"/>
+          </p:cNvPicPr>
+          <p:nvPr/>
+        </p:nvPicPr>
+        <p:blipFill>
+          <a:blip r:embed="rId2"/>
+          <a:stretch>
+            <a:fillRect/>
+          </a:stretch>
+        </p:blipFill>
+        <p:spPr>
+          <a:xfrm>
             <a:off x="685800" y="1872610"/>
             <a:ext cx="4754880" cy="3844301"/>
           </a:xfrm>
@@ -4156,7 +4841,7 @@
       </p:pic>
       <p:sp>
         <p:nvSpPr>
-          <p:cNvPr id="6" name="Shape 2"/>
+          <p:cNvPr id="10" name="Shape 5"/>
           <p:cNvSpPr/>
           <p:nvPr/>
         </p:nvSpPr>
@@ -4181,7 +4866,7 @@
       </p:sp>
       <p:sp>
         <p:nvSpPr>
-          <p:cNvPr id="7" name="Text 3"/>
+          <p:cNvPr id="11" name="Text 6"/>
           <p:cNvSpPr txBox="1"/>
           <p:nvPr/>
         </p:nvSpPr>
@@ -4223,7 +4908,7 @@
       </p:sp>
       <p:sp>
         <p:nvSpPr>
-          <p:cNvPr id="8" name="Shape 4"/>
+          <p:cNvPr id="12" name="Shape 7"/>
           <p:cNvSpPr/>
           <p:nvPr/>
         </p:nvSpPr>
@@ -4248,7 +4933,7 @@
       </p:sp>
       <p:sp>
         <p:nvSpPr>
-          <p:cNvPr id="9" name="Text 5"/>
+          <p:cNvPr id="13" name="Text 8"/>
           <p:cNvSpPr txBox="1"/>
           <p:nvPr/>
         </p:nvSpPr>
@@ -4290,7 +4975,7 @@
       </p:sp>
       <p:sp>
         <p:nvSpPr>
-          <p:cNvPr id="10" name="Shape 6"/>
+          <p:cNvPr id="14" name="Shape 9"/>
           <p:cNvSpPr/>
           <p:nvPr/>
         </p:nvSpPr>
@@ -4315,7 +5000,7 @@
       </p:sp>
       <p:sp>
         <p:nvSpPr>
-          <p:cNvPr id="11" name="Text 7"/>
+          <p:cNvPr id="15" name="Text 10"/>
           <p:cNvSpPr txBox="1"/>
           <p:nvPr/>
         </p:nvSpPr>
@@ -4357,7 +5042,7 @@
       </p:sp>
       <p:sp>
         <p:nvSpPr>
-          <p:cNvPr id="12" name="Shape 8"/>
+          <p:cNvPr id="16" name="Shape 11"/>
           <p:cNvSpPr/>
           <p:nvPr/>
         </p:nvSpPr>
@@ -4382,7 +5067,7 @@
       </p:sp>
       <p:sp>
         <p:nvSpPr>
-          <p:cNvPr id="13" name="Text 9"/>
+          <p:cNvPr id="17" name="Text 12"/>
           <p:cNvSpPr txBox="1"/>
           <p:nvPr/>
         </p:nvSpPr>
@@ -4424,7 +5109,7 @@
       </p:sp>
       <p:sp>
         <p:nvSpPr>
-          <p:cNvPr id="14" name="Shape 10"/>
+          <p:cNvPr id="18" name="Shape 13"/>
           <p:cNvSpPr/>
           <p:nvPr/>
         </p:nvSpPr>
@@ -4449,7 +5134,7 @@
       </p:sp>
       <p:sp>
         <p:nvSpPr>
-          <p:cNvPr id="15" name="Text 11"/>
+          <p:cNvPr id="19" name="Text 14"/>
           <p:cNvSpPr txBox="1"/>
           <p:nvPr/>
         </p:nvSpPr>
@@ -5105,6 +5790,133 @@
       </p:sp>
       <p:sp>
         <p:nvSpPr>
+          <p:cNvPr id="16" name="Shape 14"/>
+          <p:cNvSpPr/>
+          <p:nvPr/>
+        </p:nvSpPr>
+        <p:spPr>
+          <a:xfrm>
+            <a:off x="7854645" y="91440"/>
+            <a:ext cx="3788410" cy="274320"/>
+          </a:xfrm>
+          <a:prstGeom prst="rect">
+            <a:avLst/>
+          </a:prstGeom>
+          <a:solidFill>
+            <a:srgbClr val="E0F2FE"/>
+          </a:solidFill>
+          <a:ln w="12700">
+            <a:solidFill>
+              <a:srgbClr val="0369A1"/>
+            </a:solidFill>
+            <a:prstDash val="solid"/>
+          </a:ln>
+        </p:spPr>
+      </p:sp>
+      <p:sp>
+        <p:nvSpPr>
+          <p:cNvPr id="17" name="Shape 15"/>
+          <p:cNvSpPr/>
+          <p:nvPr/>
+        </p:nvSpPr>
+        <p:spPr>
+          <a:xfrm>
+            <a:off x="7854645" y="91440"/>
+            <a:ext cx="73152" cy="274320"/>
+          </a:xfrm>
+          <a:prstGeom prst="rect">
+            <a:avLst/>
+          </a:prstGeom>
+          <a:solidFill>
+            <a:srgbClr val="0369A1"/>
+          </a:solidFill>
+          <a:ln w="12700">
+            <a:solidFill>
+              <a:srgbClr val="0369A1"/>
+            </a:solidFill>
+            <a:prstDash val="solid"/>
+          </a:ln>
+        </p:spPr>
+      </p:sp>
+      <p:pic>
+        <p:nvPicPr>
+          <p:cNvPr id="18" name="Image 0" descr="preencoded.png">    </p:cNvPr>
+          <p:cNvPicPr>
+            <a:picLocks noChangeAspect="1"/>
+          </p:cNvPicPr>
+          <p:nvPr/>
+        </p:nvPicPr>
+        <p:blipFill>
+          <a:blip r:embed="rId1"/>
+          <a:stretch>
+            <a:fillRect/>
+          </a:stretch>
+        </p:blipFill>
+        <p:spPr>
+          <a:xfrm>
+            <a:off x="7982661" y="128016"/>
+            <a:ext cx="201168" cy="201168"/>
+          </a:xfrm>
+          <a:prstGeom prst="rect">
+            <a:avLst/>
+          </a:prstGeom>
+        </p:spPr>
+      </p:pic>
+      <p:sp>
+        <p:nvSpPr>
+          <p:cNvPr id="19" name="Text 16"/>
+          <p:cNvSpPr txBox="1"/>
+          <p:nvPr/>
+        </p:nvSpPr>
+        <p:spPr>
+          <a:xfrm>
+            <a:off x="8238693" y="91440"/>
+            <a:ext cx="3367786" cy="274320"/>
+          </a:xfrm>
+          <a:prstGeom prst="rect">
+            <a:avLst/>
+          </a:prstGeom>
+          <a:noFill/>
+          <a:ln/>
+        </p:spPr>
+        <p:txBody>
+          <a:bodyPr wrap="square" lIns="0" tIns="0" rIns="0" bIns="0" rtlCol="0" anchor="ctr"/>
+          <a:lstStyle/>
+          <a:p>
+            <a:pPr indent="0" marL="0">
+              <a:buNone/>
+            </a:pPr>
+            <a:r>
+              <a:rPr lang="en-US" sz="1100" b="1" dirty="0">
+                <a:solidFill>
+                  <a:srgbClr val="075985"/>
+                </a:solidFill>
+                <a:latin typeface="Calibri" pitchFamily="34" charset="0"/>
+                <a:ea typeface="Calibri" pitchFamily="34" charset="-122"/>
+                <a:cs typeface="Calibri" pitchFamily="34" charset="-120"/>
+              </a:rPr>
+              <a:t>DA COMPRENDERE OGGI</a:t>
+            </a:r>
+            <a:pPr indent="0" marL="0">
+              <a:buNone/>
+            </a:pPr>
+            <a:r>
+              <a:rPr lang="en-US" sz="1100" dirty="0">
+                <a:solidFill>
+                  <a:srgbClr val="075985"/>
+                </a:solidFill>
+                <a:latin typeface="Calibri" pitchFamily="34" charset="0"/>
+                <a:ea typeface="Calibri" pitchFamily="34" charset="-122"/>
+                <a:cs typeface="Calibri" pitchFamily="34" charset="-120"/>
+              </a:rPr>
+              <a:t> · la memoria secondaria</a:t>
+            </a:r>
+            <a:endParaRPr lang="en-US" sz="1100" dirty="0"/>
+          </a:p>
+        </p:txBody>
+      </p:sp>
+      <p:sp>
+        <p:nvSpPr>
           <p:cNvPr id="25" name="Slide Number Placeholder 0"/>
           <p:cNvSpPr>
             <a:spLocks noGrp="1"/>
@@ -5579,6 +6391,133 @@
       </p:sp>
       <p:sp>
         <p:nvSpPr>
+          <p:cNvPr id="9" name="Shape 7"/>
+          <p:cNvSpPr/>
+          <p:nvPr/>
+        </p:nvSpPr>
+        <p:spPr>
+          <a:xfrm>
+            <a:off x="7854645" y="91440"/>
+            <a:ext cx="3788410" cy="274320"/>
+          </a:xfrm>
+          <a:prstGeom prst="rect">
+            <a:avLst/>
+          </a:prstGeom>
+          <a:solidFill>
+            <a:srgbClr val="E0F2FE"/>
+          </a:solidFill>
+          <a:ln w="12700">
+            <a:solidFill>
+              <a:srgbClr val="0369A1"/>
+            </a:solidFill>
+            <a:prstDash val="solid"/>
+          </a:ln>
+        </p:spPr>
+      </p:sp>
+      <p:sp>
+        <p:nvSpPr>
+          <p:cNvPr id="10" name="Shape 8"/>
+          <p:cNvSpPr/>
+          <p:nvPr/>
+        </p:nvSpPr>
+        <p:spPr>
+          <a:xfrm>
+            <a:off x="7854645" y="91440"/>
+            <a:ext cx="73152" cy="274320"/>
+          </a:xfrm>
+          <a:prstGeom prst="rect">
+            <a:avLst/>
+          </a:prstGeom>
+          <a:solidFill>
+            <a:srgbClr val="0369A1"/>
+          </a:solidFill>
+          <a:ln w="12700">
+            <a:solidFill>
+              <a:srgbClr val="0369A1"/>
+            </a:solidFill>
+            <a:prstDash val="solid"/>
+          </a:ln>
+        </p:spPr>
+      </p:sp>
+      <p:pic>
+        <p:nvPicPr>
+          <p:cNvPr id="11" name="Image 0" descr="preencoded.png">    </p:cNvPr>
+          <p:cNvPicPr>
+            <a:picLocks noChangeAspect="1"/>
+          </p:cNvPicPr>
+          <p:nvPr/>
+        </p:nvPicPr>
+        <p:blipFill>
+          <a:blip r:embed="rId1"/>
+          <a:stretch>
+            <a:fillRect/>
+          </a:stretch>
+        </p:blipFill>
+        <p:spPr>
+          <a:xfrm>
+            <a:off x="7982661" y="128016"/>
+            <a:ext cx="201168" cy="201168"/>
+          </a:xfrm>
+          <a:prstGeom prst="rect">
+            <a:avLst/>
+          </a:prstGeom>
+        </p:spPr>
+      </p:pic>
+      <p:sp>
+        <p:nvSpPr>
+          <p:cNvPr id="12" name="Text 9"/>
+          <p:cNvSpPr txBox="1"/>
+          <p:nvPr/>
+        </p:nvSpPr>
+        <p:spPr>
+          <a:xfrm>
+            <a:off x="8238693" y="91440"/>
+            <a:ext cx="3367786" cy="274320"/>
+          </a:xfrm>
+          <a:prstGeom prst="rect">
+            <a:avLst/>
+          </a:prstGeom>
+          <a:noFill/>
+          <a:ln/>
+        </p:spPr>
+        <p:txBody>
+          <a:bodyPr wrap="square" lIns="0" tIns="0" rIns="0" bIns="0" rtlCol="0" anchor="ctr"/>
+          <a:lstStyle/>
+          <a:p>
+            <a:pPr indent="0" marL="0">
+              <a:buNone/>
+            </a:pPr>
+            <a:r>
+              <a:rPr lang="en-US" sz="1100" b="1" dirty="0">
+                <a:solidFill>
+                  <a:srgbClr val="075985"/>
+                </a:solidFill>
+                <a:latin typeface="Calibri" pitchFamily="34" charset="0"/>
+                <a:ea typeface="Calibri" pitchFamily="34" charset="-122"/>
+                <a:cs typeface="Calibri" pitchFamily="34" charset="-120"/>
+              </a:rPr>
+              <a:t>DA COMPRENDERE OGGI</a:t>
+            </a:r>
+            <a:pPr indent="0" marL="0">
+              <a:buNone/>
+            </a:pPr>
+            <a:r>
+              <a:rPr lang="en-US" sz="1100" dirty="0">
+                <a:solidFill>
+                  <a:srgbClr val="075985"/>
+                </a:solidFill>
+                <a:latin typeface="Calibri" pitchFamily="34" charset="0"/>
+                <a:ea typeface="Calibri" pitchFamily="34" charset="-122"/>
+                <a:cs typeface="Calibri" pitchFamily="34" charset="-120"/>
+              </a:rPr>
+              <a:t> · la memoria secondaria</a:t>
+            </a:r>
+            <a:endParaRPr lang="en-US" sz="1100" dirty="0"/>
+          </a:p>
+        </p:txBody>
+      </p:sp>
+      <p:sp>
+        <p:nvSpPr>
           <p:cNvPr id="25" name="Slide Number Placeholder 0"/>
           <p:cNvSpPr>
             <a:spLocks noGrp="1"/>
@@ -6064,6 +7003,133 @@
       </p:sp>
       <p:sp>
         <p:nvSpPr>
+          <p:cNvPr id="13" name="Shape 10"/>
+          <p:cNvSpPr/>
+          <p:nvPr/>
+        </p:nvSpPr>
+        <p:spPr>
+          <a:xfrm>
+            <a:off x="7854645" y="91440"/>
+            <a:ext cx="3788410" cy="274320"/>
+          </a:xfrm>
+          <a:prstGeom prst="rect">
+            <a:avLst/>
+          </a:prstGeom>
+          <a:solidFill>
+            <a:srgbClr val="E0F2FE"/>
+          </a:solidFill>
+          <a:ln w="12700">
+            <a:solidFill>
+              <a:srgbClr val="0369A1"/>
+            </a:solidFill>
+            <a:prstDash val="solid"/>
+          </a:ln>
+        </p:spPr>
+      </p:sp>
+      <p:sp>
+        <p:nvSpPr>
+          <p:cNvPr id="14" name="Shape 11"/>
+          <p:cNvSpPr/>
+          <p:nvPr/>
+        </p:nvSpPr>
+        <p:spPr>
+          <a:xfrm>
+            <a:off x="7854645" y="91440"/>
+            <a:ext cx="73152" cy="274320"/>
+          </a:xfrm>
+          <a:prstGeom prst="rect">
+            <a:avLst/>
+          </a:prstGeom>
+          <a:solidFill>
+            <a:srgbClr val="0369A1"/>
+          </a:solidFill>
+          <a:ln w="12700">
+            <a:solidFill>
+              <a:srgbClr val="0369A1"/>
+            </a:solidFill>
+            <a:prstDash val="solid"/>
+          </a:ln>
+        </p:spPr>
+      </p:sp>
+      <p:pic>
+        <p:nvPicPr>
+          <p:cNvPr id="15" name="Image 1" descr="preencoded.png">    </p:cNvPr>
+          <p:cNvPicPr>
+            <a:picLocks noChangeAspect="1"/>
+          </p:cNvPicPr>
+          <p:nvPr/>
+        </p:nvPicPr>
+        <p:blipFill>
+          <a:blip r:embed="rId2"/>
+          <a:stretch>
+            <a:fillRect/>
+          </a:stretch>
+        </p:blipFill>
+        <p:spPr>
+          <a:xfrm>
+            <a:off x="7982661" y="128016"/>
+            <a:ext cx="201168" cy="201168"/>
+          </a:xfrm>
+          <a:prstGeom prst="rect">
+            <a:avLst/>
+          </a:prstGeom>
+        </p:spPr>
+      </p:pic>
+      <p:sp>
+        <p:nvSpPr>
+          <p:cNvPr id="16" name="Text 12"/>
+          <p:cNvSpPr txBox="1"/>
+          <p:nvPr/>
+        </p:nvSpPr>
+        <p:spPr>
+          <a:xfrm>
+            <a:off x="8238693" y="91440"/>
+            <a:ext cx="3367786" cy="274320"/>
+          </a:xfrm>
+          <a:prstGeom prst="rect">
+            <a:avLst/>
+          </a:prstGeom>
+          <a:noFill/>
+          <a:ln/>
+        </p:spPr>
+        <p:txBody>
+          <a:bodyPr wrap="square" lIns="0" tIns="0" rIns="0" bIns="0" rtlCol="0" anchor="ctr"/>
+          <a:lstStyle/>
+          <a:p>
+            <a:pPr indent="0" marL="0">
+              <a:buNone/>
+            </a:pPr>
+            <a:r>
+              <a:rPr lang="en-US" sz="1100" b="1" dirty="0">
+                <a:solidFill>
+                  <a:srgbClr val="075985"/>
+                </a:solidFill>
+                <a:latin typeface="Calibri" pitchFamily="34" charset="0"/>
+                <a:ea typeface="Calibri" pitchFamily="34" charset="-122"/>
+                <a:cs typeface="Calibri" pitchFamily="34" charset="-120"/>
+              </a:rPr>
+              <a:t>DA COMPRENDERE OGGI</a:t>
+            </a:r>
+            <a:pPr indent="0" marL="0">
+              <a:buNone/>
+            </a:pPr>
+            <a:r>
+              <a:rPr lang="en-US" sz="1100" dirty="0">
+                <a:solidFill>
+                  <a:srgbClr val="075985"/>
+                </a:solidFill>
+                <a:latin typeface="Calibri" pitchFamily="34" charset="0"/>
+                <a:ea typeface="Calibri" pitchFamily="34" charset="-122"/>
+                <a:cs typeface="Calibri" pitchFamily="34" charset="-120"/>
+              </a:rPr>
+              <a:t> · la memoria secondaria</a:t>
+            </a:r>
+            <a:endParaRPr lang="en-US" sz="1100" dirty="0"/>
+          </a:p>
+        </p:txBody>
+      </p:sp>
+      <p:sp>
+        <p:nvSpPr>
           <p:cNvPr id="25" name="Slide Number Placeholder 0"/>
           <p:cNvSpPr>
             <a:spLocks noGrp="1"/>
@@ -6616,6 +7682,133 @@
       </p:sp>
       <p:sp>
         <p:nvSpPr>
+          <p:cNvPr id="15" name="Shape 12"/>
+          <p:cNvSpPr/>
+          <p:nvPr/>
+        </p:nvSpPr>
+        <p:spPr>
+          <a:xfrm>
+            <a:off x="7854645" y="91440"/>
+            <a:ext cx="3788410" cy="274320"/>
+          </a:xfrm>
+          <a:prstGeom prst="rect">
+            <a:avLst/>
+          </a:prstGeom>
+          <a:solidFill>
+            <a:srgbClr val="E0F2FE"/>
+          </a:solidFill>
+          <a:ln w="12700">
+            <a:solidFill>
+              <a:srgbClr val="0369A1"/>
+            </a:solidFill>
+            <a:prstDash val="solid"/>
+          </a:ln>
+        </p:spPr>
+      </p:sp>
+      <p:sp>
+        <p:nvSpPr>
+          <p:cNvPr id="16" name="Shape 13"/>
+          <p:cNvSpPr/>
+          <p:nvPr/>
+        </p:nvSpPr>
+        <p:spPr>
+          <a:xfrm>
+            <a:off x="7854645" y="91440"/>
+            <a:ext cx="73152" cy="274320"/>
+          </a:xfrm>
+          <a:prstGeom prst="rect">
+            <a:avLst/>
+          </a:prstGeom>
+          <a:solidFill>
+            <a:srgbClr val="0369A1"/>
+          </a:solidFill>
+          <a:ln w="12700">
+            <a:solidFill>
+              <a:srgbClr val="0369A1"/>
+            </a:solidFill>
+            <a:prstDash val="solid"/>
+          </a:ln>
+        </p:spPr>
+      </p:sp>
+      <p:pic>
+        <p:nvPicPr>
+          <p:cNvPr id="17" name="Image 1" descr="preencoded.png">    </p:cNvPr>
+          <p:cNvPicPr>
+            <a:picLocks noChangeAspect="1"/>
+          </p:cNvPicPr>
+          <p:nvPr/>
+        </p:nvPicPr>
+        <p:blipFill>
+          <a:blip r:embed="rId2"/>
+          <a:stretch>
+            <a:fillRect/>
+          </a:stretch>
+        </p:blipFill>
+        <p:spPr>
+          <a:xfrm>
+            <a:off x="7982661" y="128016"/>
+            <a:ext cx="201168" cy="201168"/>
+          </a:xfrm>
+          <a:prstGeom prst="rect">
+            <a:avLst/>
+          </a:prstGeom>
+        </p:spPr>
+      </p:pic>
+      <p:sp>
+        <p:nvSpPr>
+          <p:cNvPr id="18" name="Text 14"/>
+          <p:cNvSpPr txBox="1"/>
+          <p:nvPr/>
+        </p:nvSpPr>
+        <p:spPr>
+          <a:xfrm>
+            <a:off x="8238693" y="91440"/>
+            <a:ext cx="3367786" cy="274320"/>
+          </a:xfrm>
+          <a:prstGeom prst="rect">
+            <a:avLst/>
+          </a:prstGeom>
+          <a:noFill/>
+          <a:ln/>
+        </p:spPr>
+        <p:txBody>
+          <a:bodyPr wrap="square" lIns="0" tIns="0" rIns="0" bIns="0" rtlCol="0" anchor="ctr"/>
+          <a:lstStyle/>
+          <a:p>
+            <a:pPr indent="0" marL="0">
+              <a:buNone/>
+            </a:pPr>
+            <a:r>
+              <a:rPr lang="en-US" sz="1100" b="1" dirty="0">
+                <a:solidFill>
+                  <a:srgbClr val="075985"/>
+                </a:solidFill>
+                <a:latin typeface="Calibri" pitchFamily="34" charset="0"/>
+                <a:ea typeface="Calibri" pitchFamily="34" charset="-122"/>
+                <a:cs typeface="Calibri" pitchFamily="34" charset="-120"/>
+              </a:rPr>
+              <a:t>DA COMPRENDERE OGGI</a:t>
+            </a:r>
+            <a:pPr indent="0" marL="0">
+              <a:buNone/>
+            </a:pPr>
+            <a:r>
+              <a:rPr lang="en-US" sz="1100" dirty="0">
+                <a:solidFill>
+                  <a:srgbClr val="075985"/>
+                </a:solidFill>
+                <a:latin typeface="Calibri" pitchFamily="34" charset="0"/>
+                <a:ea typeface="Calibri" pitchFamily="34" charset="-122"/>
+                <a:cs typeface="Calibri" pitchFamily="34" charset="-120"/>
+              </a:rPr>
+              <a:t> · la memoria secondaria</a:t>
+            </a:r>
+            <a:endParaRPr lang="en-US" sz="1100" dirty="0"/>
+          </a:p>
+        </p:txBody>
+      </p:sp>
+      <p:sp>
+        <p:nvSpPr>
           <p:cNvPr id="25" name="Slide Number Placeholder 0"/>
           <p:cNvSpPr>
             <a:spLocks noGrp="1"/>
@@ -7456,6 +8649,133 @@
               <a:t>Un sistema di calcolo moderno ha più livelli di memoria permanente, spesso gestiti in automatico: i dati usati spesso migrano verso i livelli veloci, il resto scende verso quelli economici.</a:t>
             </a:r>
             <a:endParaRPr lang="en-US" sz="2000" dirty="0"/>
+          </a:p>
+        </p:txBody>
+      </p:sp>
+      <p:sp>
+        <p:nvSpPr>
+          <p:cNvPr id="24" name="Shape 22"/>
+          <p:cNvSpPr/>
+          <p:nvPr/>
+        </p:nvSpPr>
+        <p:spPr>
+          <a:xfrm>
+            <a:off x="7854645" y="91440"/>
+            <a:ext cx="3788410" cy="274320"/>
+          </a:xfrm>
+          <a:prstGeom prst="rect">
+            <a:avLst/>
+          </a:prstGeom>
+          <a:solidFill>
+            <a:srgbClr val="E0F2FE"/>
+          </a:solidFill>
+          <a:ln w="12700">
+            <a:solidFill>
+              <a:srgbClr val="0369A1"/>
+            </a:solidFill>
+            <a:prstDash val="solid"/>
+          </a:ln>
+        </p:spPr>
+      </p:sp>
+      <p:sp>
+        <p:nvSpPr>
+          <p:cNvPr id="25" name="Shape 23"/>
+          <p:cNvSpPr/>
+          <p:nvPr/>
+        </p:nvSpPr>
+        <p:spPr>
+          <a:xfrm>
+            <a:off x="7854645" y="91440"/>
+            <a:ext cx="73152" cy="274320"/>
+          </a:xfrm>
+          <a:prstGeom prst="rect">
+            <a:avLst/>
+          </a:prstGeom>
+          <a:solidFill>
+            <a:srgbClr val="0369A1"/>
+          </a:solidFill>
+          <a:ln w="12700">
+            <a:solidFill>
+              <a:srgbClr val="0369A1"/>
+            </a:solidFill>
+            <a:prstDash val="solid"/>
+          </a:ln>
+        </p:spPr>
+      </p:sp>
+      <p:pic>
+        <p:nvPicPr>
+          <p:cNvPr id="26" name="Image 0" descr="preencoded.png">    </p:cNvPr>
+          <p:cNvPicPr>
+            <a:picLocks noChangeAspect="1"/>
+          </p:cNvPicPr>
+          <p:nvPr/>
+        </p:nvPicPr>
+        <p:blipFill>
+          <a:blip r:embed="rId1"/>
+          <a:stretch>
+            <a:fillRect/>
+          </a:stretch>
+        </p:blipFill>
+        <p:spPr>
+          <a:xfrm>
+            <a:off x="7982661" y="128016"/>
+            <a:ext cx="201168" cy="201168"/>
+          </a:xfrm>
+          <a:prstGeom prst="rect">
+            <a:avLst/>
+          </a:prstGeom>
+        </p:spPr>
+      </p:pic>
+      <p:sp>
+        <p:nvSpPr>
+          <p:cNvPr id="27" name="Text 24"/>
+          <p:cNvSpPr txBox="1"/>
+          <p:nvPr/>
+        </p:nvSpPr>
+        <p:spPr>
+          <a:xfrm>
+            <a:off x="8238693" y="91440"/>
+            <a:ext cx="3367786" cy="274320"/>
+          </a:xfrm>
+          <a:prstGeom prst="rect">
+            <a:avLst/>
+          </a:prstGeom>
+          <a:noFill/>
+          <a:ln/>
+        </p:spPr>
+        <p:txBody>
+          <a:bodyPr wrap="square" lIns="0" tIns="0" rIns="0" bIns="0" rtlCol="0" anchor="ctr"/>
+          <a:lstStyle/>
+          <a:p>
+            <a:pPr indent="0" marL="0">
+              <a:buNone/>
+            </a:pPr>
+            <a:r>
+              <a:rPr lang="en-US" sz="1100" b="1" dirty="0">
+                <a:solidFill>
+                  <a:srgbClr val="075985"/>
+                </a:solidFill>
+                <a:latin typeface="Calibri" pitchFamily="34" charset="0"/>
+                <a:ea typeface="Calibri" pitchFamily="34" charset="-122"/>
+                <a:cs typeface="Calibri" pitchFamily="34" charset="-120"/>
+              </a:rPr>
+              <a:t>DA COMPRENDERE OGGI</a:t>
+            </a:r>
+            <a:pPr indent="0" marL="0">
+              <a:buNone/>
+            </a:pPr>
+            <a:r>
+              <a:rPr lang="en-US" sz="1100" dirty="0">
+                <a:solidFill>
+                  <a:srgbClr val="075985"/>
+                </a:solidFill>
+                <a:latin typeface="Calibri" pitchFamily="34" charset="0"/>
+                <a:ea typeface="Calibri" pitchFamily="34" charset="-122"/>
+                <a:cs typeface="Calibri" pitchFamily="34" charset="-120"/>
+              </a:rPr>
+              <a:t> · la memoria secondaria</a:t>
+            </a:r>
+            <a:endParaRPr lang="en-US" sz="1100" dirty="0"/>
           </a:p>
         </p:txBody>
       </p:sp>
@@ -13881,6 +15201,133 @@
       </p:sp>
       <p:sp>
         <p:nvSpPr>
+          <p:cNvPr id="27" name="Shape 25"/>
+          <p:cNvSpPr/>
+          <p:nvPr/>
+        </p:nvSpPr>
+        <p:spPr>
+          <a:xfrm>
+            <a:off x="7329373" y="91440"/>
+            <a:ext cx="4313682" cy="274320"/>
+          </a:xfrm>
+          <a:prstGeom prst="rect">
+            <a:avLst/>
+          </a:prstGeom>
+          <a:solidFill>
+            <a:srgbClr val="E0F2FE"/>
+          </a:solidFill>
+          <a:ln w="12700">
+            <a:solidFill>
+              <a:srgbClr val="0369A1"/>
+            </a:solidFill>
+            <a:prstDash val="solid"/>
+          </a:ln>
+        </p:spPr>
+      </p:sp>
+      <p:sp>
+        <p:nvSpPr>
+          <p:cNvPr id="28" name="Shape 26"/>
+          <p:cNvSpPr/>
+          <p:nvPr/>
+        </p:nvSpPr>
+        <p:spPr>
+          <a:xfrm>
+            <a:off x="7329373" y="91440"/>
+            <a:ext cx="73152" cy="274320"/>
+          </a:xfrm>
+          <a:prstGeom prst="rect">
+            <a:avLst/>
+          </a:prstGeom>
+          <a:solidFill>
+            <a:srgbClr val="0369A1"/>
+          </a:solidFill>
+          <a:ln w="12700">
+            <a:solidFill>
+              <a:srgbClr val="0369A1"/>
+            </a:solidFill>
+            <a:prstDash val="solid"/>
+          </a:ln>
+        </p:spPr>
+      </p:sp>
+      <p:pic>
+        <p:nvPicPr>
+          <p:cNvPr id="29" name="Image 0" descr="preencoded.png">    </p:cNvPr>
+          <p:cNvPicPr>
+            <a:picLocks noChangeAspect="1"/>
+          </p:cNvPicPr>
+          <p:nvPr/>
+        </p:nvPicPr>
+        <p:blipFill>
+          <a:blip r:embed="rId1"/>
+          <a:stretch>
+            <a:fillRect/>
+          </a:stretch>
+        </p:blipFill>
+        <p:spPr>
+          <a:xfrm>
+            <a:off x="7457389" y="128016"/>
+            <a:ext cx="201168" cy="201168"/>
+          </a:xfrm>
+          <a:prstGeom prst="rect">
+            <a:avLst/>
+          </a:prstGeom>
+        </p:spPr>
+      </p:pic>
+      <p:sp>
+        <p:nvSpPr>
+          <p:cNvPr id="30" name="Text 27"/>
+          <p:cNvSpPr txBox="1"/>
+          <p:nvPr/>
+        </p:nvSpPr>
+        <p:spPr>
+          <a:xfrm>
+            <a:off x="7713421" y="91440"/>
+            <a:ext cx="3893058" cy="274320"/>
+          </a:xfrm>
+          <a:prstGeom prst="rect">
+            <a:avLst/>
+          </a:prstGeom>
+          <a:noFill/>
+          <a:ln/>
+        </p:spPr>
+        <p:txBody>
+          <a:bodyPr wrap="square" lIns="0" tIns="0" rIns="0" bIns="0" rtlCol="0" anchor="ctr"/>
+          <a:lstStyle/>
+          <a:p>
+            <a:pPr indent="0" marL="0">
+              <a:buNone/>
+            </a:pPr>
+            <a:r>
+              <a:rPr lang="en-US" sz="1100" b="1" dirty="0">
+                <a:solidFill>
+                  <a:srgbClr val="075985"/>
+                </a:solidFill>
+                <a:latin typeface="Calibri" pitchFamily="34" charset="0"/>
+                <a:ea typeface="Calibri" pitchFamily="34" charset="-122"/>
+                <a:cs typeface="Calibri" pitchFamily="34" charset="-120"/>
+              </a:rPr>
+              <a:t>DA COMPRENDERE OGGI</a:t>
+            </a:r>
+            <a:pPr indent="0" marL="0">
+              <a:buNone/>
+            </a:pPr>
+            <a:r>
+              <a:rPr lang="en-US" sz="1100" dirty="0">
+                <a:solidFill>
+                  <a:srgbClr val="075985"/>
+                </a:solidFill>
+                <a:latin typeface="Calibri" pitchFamily="34" charset="0"/>
+                <a:ea typeface="Calibri" pitchFamily="34" charset="-122"/>
+                <a:cs typeface="Calibri" pitchFamily="34" charset="-120"/>
+              </a:rPr>
+              <a:t> · l'architettura di von Neumann</a:t>
+            </a:r>
+            <a:endParaRPr lang="en-US" sz="1100" dirty="0"/>
+          </a:p>
+        </p:txBody>
+      </p:sp>
+      <p:sp>
+        <p:nvSpPr>
           <p:cNvPr id="25" name="Slide Number Placeholder 0"/>
           <p:cNvSpPr>
             <a:spLocks noGrp="1"/>
@@ -14443,6 +15890,133 @@
               <a:t>dalla prima istruzione dopo il reset al vostro programma, attraverso strati di memoria permanente</a:t>
             </a:r>
             <a:endParaRPr lang="en-US" sz="1900" dirty="0"/>
+          </a:p>
+        </p:txBody>
+      </p:sp>
+      <p:sp>
+        <p:nvSpPr>
+          <p:cNvPr id="14" name="Shape 12"/>
+          <p:cNvSpPr/>
+          <p:nvPr/>
+        </p:nvSpPr>
+        <p:spPr>
+          <a:xfrm>
+            <a:off x="7920304" y="91440"/>
+            <a:ext cx="3722751" cy="274320"/>
+          </a:xfrm>
+          <a:prstGeom prst="rect">
+            <a:avLst/>
+          </a:prstGeom>
+          <a:solidFill>
+            <a:srgbClr val="E0F2FE"/>
+          </a:solidFill>
+          <a:ln w="12700">
+            <a:solidFill>
+              <a:srgbClr val="0369A1"/>
+            </a:solidFill>
+            <a:prstDash val="solid"/>
+          </a:ln>
+        </p:spPr>
+      </p:sp>
+      <p:sp>
+        <p:nvSpPr>
+          <p:cNvPr id="15" name="Shape 13"/>
+          <p:cNvSpPr/>
+          <p:nvPr/>
+        </p:nvSpPr>
+        <p:spPr>
+          <a:xfrm>
+            <a:off x="7920304" y="91440"/>
+            <a:ext cx="73152" cy="274320"/>
+          </a:xfrm>
+          <a:prstGeom prst="rect">
+            <a:avLst/>
+          </a:prstGeom>
+          <a:solidFill>
+            <a:srgbClr val="0369A1"/>
+          </a:solidFill>
+          <a:ln w="12700">
+            <a:solidFill>
+              <a:srgbClr val="0369A1"/>
+            </a:solidFill>
+            <a:prstDash val="solid"/>
+          </a:ln>
+        </p:spPr>
+      </p:sp>
+      <p:pic>
+        <p:nvPicPr>
+          <p:cNvPr id="16" name="Image 0" descr="preencoded.png">    </p:cNvPr>
+          <p:cNvPicPr>
+            <a:picLocks noChangeAspect="1"/>
+          </p:cNvPicPr>
+          <p:nvPr/>
+        </p:nvPicPr>
+        <p:blipFill>
+          <a:blip r:embed="rId1"/>
+          <a:stretch>
+            <a:fillRect/>
+          </a:stretch>
+        </p:blipFill>
+        <p:spPr>
+          <a:xfrm>
+            <a:off x="8048320" y="128016"/>
+            <a:ext cx="201168" cy="201168"/>
+          </a:xfrm>
+          <a:prstGeom prst="rect">
+            <a:avLst/>
+          </a:prstGeom>
+        </p:spPr>
+      </p:pic>
+      <p:sp>
+        <p:nvSpPr>
+          <p:cNvPr id="17" name="Text 14"/>
+          <p:cNvSpPr txBox="1"/>
+          <p:nvPr/>
+        </p:nvSpPr>
+        <p:spPr>
+          <a:xfrm>
+            <a:off x="8304352" y="91440"/>
+            <a:ext cx="3302127" cy="274320"/>
+          </a:xfrm>
+          <a:prstGeom prst="rect">
+            <a:avLst/>
+          </a:prstGeom>
+          <a:noFill/>
+          <a:ln/>
+        </p:spPr>
+        <p:txBody>
+          <a:bodyPr wrap="square" lIns="0" tIns="0" rIns="0" bIns="0" rtlCol="0" anchor="ctr"/>
+          <a:lstStyle/>
+          <a:p>
+            <a:pPr indent="0" marL="0">
+              <a:buNone/>
+            </a:pPr>
+            <a:r>
+              <a:rPr lang="en-US" sz="1100" b="1" dirty="0">
+                <a:solidFill>
+                  <a:srgbClr val="075985"/>
+                </a:solidFill>
+                <a:latin typeface="Calibri" pitchFamily="34" charset="0"/>
+                <a:ea typeface="Calibri" pitchFamily="34" charset="-122"/>
+                <a:cs typeface="Calibri" pitchFamily="34" charset="-120"/>
+              </a:rPr>
+              <a:t>DA COMPRENDERE OGGI</a:t>
+            </a:r>
+            <a:pPr indent="0" marL="0">
+              <a:buNone/>
+            </a:pPr>
+            <a:r>
+              <a:rPr lang="en-US" sz="1100" dirty="0">
+                <a:solidFill>
+                  <a:srgbClr val="075985"/>
+                </a:solidFill>
+                <a:latin typeface="Calibri" pitchFamily="34" charset="0"/>
+                <a:ea typeface="Calibri" pitchFamily="34" charset="-122"/>
+                <a:cs typeface="Calibri" pitchFamily="34" charset="-120"/>
+              </a:rPr>
+              <a:t> · ROM, flash, firmware</a:t>
+            </a:r>
+            <a:endParaRPr lang="en-US" sz="1100" dirty="0"/>
           </a:p>
         </p:txBody>
       </p:sp>
@@ -16238,6 +17812,133 @@
       </p:graphicFrame>
       <p:sp>
         <p:nvSpPr>
+          <p:cNvPr id="4" name="Shape 1"/>
+          <p:cNvSpPr/>
+          <p:nvPr/>
+        </p:nvSpPr>
+        <p:spPr>
+          <a:xfrm>
+            <a:off x="7920304" y="91440"/>
+            <a:ext cx="3722751" cy="274320"/>
+          </a:xfrm>
+          <a:prstGeom prst="rect">
+            <a:avLst/>
+          </a:prstGeom>
+          <a:solidFill>
+            <a:srgbClr val="E0F2FE"/>
+          </a:solidFill>
+          <a:ln w="12700">
+            <a:solidFill>
+              <a:srgbClr val="0369A1"/>
+            </a:solidFill>
+            <a:prstDash val="solid"/>
+          </a:ln>
+        </p:spPr>
+      </p:sp>
+      <p:sp>
+        <p:nvSpPr>
+          <p:cNvPr id="5" name="Shape 2"/>
+          <p:cNvSpPr/>
+          <p:nvPr/>
+        </p:nvSpPr>
+        <p:spPr>
+          <a:xfrm>
+            <a:off x="7920304" y="91440"/>
+            <a:ext cx="73152" cy="274320"/>
+          </a:xfrm>
+          <a:prstGeom prst="rect">
+            <a:avLst/>
+          </a:prstGeom>
+          <a:solidFill>
+            <a:srgbClr val="0369A1"/>
+          </a:solidFill>
+          <a:ln w="12700">
+            <a:solidFill>
+              <a:srgbClr val="0369A1"/>
+            </a:solidFill>
+            <a:prstDash val="solid"/>
+          </a:ln>
+        </p:spPr>
+      </p:sp>
+      <p:pic>
+        <p:nvPicPr>
+          <p:cNvPr id="6" name="Image 0" descr="preencoded.png">    </p:cNvPr>
+          <p:cNvPicPr>
+            <a:picLocks noChangeAspect="1"/>
+          </p:cNvPicPr>
+          <p:nvPr/>
+        </p:nvPicPr>
+        <p:blipFill>
+          <a:blip r:embed="rId1"/>
+          <a:stretch>
+            <a:fillRect/>
+          </a:stretch>
+        </p:blipFill>
+        <p:spPr>
+          <a:xfrm>
+            <a:off x="8048320" y="128016"/>
+            <a:ext cx="201168" cy="201168"/>
+          </a:xfrm>
+          <a:prstGeom prst="rect">
+            <a:avLst/>
+          </a:prstGeom>
+        </p:spPr>
+      </p:pic>
+      <p:sp>
+        <p:nvSpPr>
+          <p:cNvPr id="7" name="Text 3"/>
+          <p:cNvSpPr txBox="1"/>
+          <p:nvPr/>
+        </p:nvSpPr>
+        <p:spPr>
+          <a:xfrm>
+            <a:off x="8304352" y="91440"/>
+            <a:ext cx="3302127" cy="274320"/>
+          </a:xfrm>
+          <a:prstGeom prst="rect">
+            <a:avLst/>
+          </a:prstGeom>
+          <a:noFill/>
+          <a:ln/>
+        </p:spPr>
+        <p:txBody>
+          <a:bodyPr wrap="square" lIns="0" tIns="0" rIns="0" bIns="0" rtlCol="0" anchor="ctr"/>
+          <a:lstStyle/>
+          <a:p>
+            <a:pPr indent="0" marL="0">
+              <a:buNone/>
+            </a:pPr>
+            <a:r>
+              <a:rPr lang="en-US" sz="1100" b="1" dirty="0">
+                <a:solidFill>
+                  <a:srgbClr val="075985"/>
+                </a:solidFill>
+                <a:latin typeface="Calibri" pitchFamily="34" charset="0"/>
+                <a:ea typeface="Calibri" pitchFamily="34" charset="-122"/>
+                <a:cs typeface="Calibri" pitchFamily="34" charset="-120"/>
+              </a:rPr>
+              <a:t>DA COMPRENDERE OGGI</a:t>
+            </a:r>
+            <a:pPr indent="0" marL="0">
+              <a:buNone/>
+            </a:pPr>
+            <a:r>
+              <a:rPr lang="en-US" sz="1100" dirty="0">
+                <a:solidFill>
+                  <a:srgbClr val="075985"/>
+                </a:solidFill>
+                <a:latin typeface="Calibri" pitchFamily="34" charset="0"/>
+                <a:ea typeface="Calibri" pitchFamily="34" charset="-122"/>
+                <a:cs typeface="Calibri" pitchFamily="34" charset="-120"/>
+              </a:rPr>
+              <a:t> · ROM, flash, firmware</a:t>
+            </a:r>
+            <a:endParaRPr lang="en-US" sz="1100" dirty="0"/>
+          </a:p>
+        </p:txBody>
+      </p:sp>
+      <p:sp>
+        <p:nvSpPr>
           <p:cNvPr id="25" name="Slide Number Placeholder 0"/>
           <p:cNvSpPr>
             <a:spLocks noGrp="1"/>
@@ -16750,6 +18451,133 @@
       </p:sp>
       <p:sp>
         <p:nvSpPr>
+          <p:cNvPr id="15" name="Shape 12"/>
+          <p:cNvSpPr/>
+          <p:nvPr/>
+        </p:nvSpPr>
+        <p:spPr>
+          <a:xfrm>
+            <a:off x="7920304" y="91440"/>
+            <a:ext cx="3722751" cy="274320"/>
+          </a:xfrm>
+          <a:prstGeom prst="rect">
+            <a:avLst/>
+          </a:prstGeom>
+          <a:solidFill>
+            <a:srgbClr val="E0F2FE"/>
+          </a:solidFill>
+          <a:ln w="12700">
+            <a:solidFill>
+              <a:srgbClr val="0369A1"/>
+            </a:solidFill>
+            <a:prstDash val="solid"/>
+          </a:ln>
+        </p:spPr>
+      </p:sp>
+      <p:sp>
+        <p:nvSpPr>
+          <p:cNvPr id="16" name="Shape 13"/>
+          <p:cNvSpPr/>
+          <p:nvPr/>
+        </p:nvSpPr>
+        <p:spPr>
+          <a:xfrm>
+            <a:off x="7920304" y="91440"/>
+            <a:ext cx="73152" cy="274320"/>
+          </a:xfrm>
+          <a:prstGeom prst="rect">
+            <a:avLst/>
+          </a:prstGeom>
+          <a:solidFill>
+            <a:srgbClr val="0369A1"/>
+          </a:solidFill>
+          <a:ln w="12700">
+            <a:solidFill>
+              <a:srgbClr val="0369A1"/>
+            </a:solidFill>
+            <a:prstDash val="solid"/>
+          </a:ln>
+        </p:spPr>
+      </p:sp>
+      <p:pic>
+        <p:nvPicPr>
+          <p:cNvPr id="17" name="Image 1" descr="preencoded.png">    </p:cNvPr>
+          <p:cNvPicPr>
+            <a:picLocks noChangeAspect="1"/>
+          </p:cNvPicPr>
+          <p:nvPr/>
+        </p:nvPicPr>
+        <p:blipFill>
+          <a:blip r:embed="rId2"/>
+          <a:stretch>
+            <a:fillRect/>
+          </a:stretch>
+        </p:blipFill>
+        <p:spPr>
+          <a:xfrm>
+            <a:off x="8048320" y="128016"/>
+            <a:ext cx="201168" cy="201168"/>
+          </a:xfrm>
+          <a:prstGeom prst="rect">
+            <a:avLst/>
+          </a:prstGeom>
+        </p:spPr>
+      </p:pic>
+      <p:sp>
+        <p:nvSpPr>
+          <p:cNvPr id="18" name="Text 14"/>
+          <p:cNvSpPr txBox="1"/>
+          <p:nvPr/>
+        </p:nvSpPr>
+        <p:spPr>
+          <a:xfrm>
+            <a:off x="8304352" y="91440"/>
+            <a:ext cx="3302127" cy="274320"/>
+          </a:xfrm>
+          <a:prstGeom prst="rect">
+            <a:avLst/>
+          </a:prstGeom>
+          <a:noFill/>
+          <a:ln/>
+        </p:spPr>
+        <p:txBody>
+          <a:bodyPr wrap="square" lIns="0" tIns="0" rIns="0" bIns="0" rtlCol="0" anchor="ctr"/>
+          <a:lstStyle/>
+          <a:p>
+            <a:pPr indent="0" marL="0">
+              <a:buNone/>
+            </a:pPr>
+            <a:r>
+              <a:rPr lang="en-US" sz="1100" b="1" dirty="0">
+                <a:solidFill>
+                  <a:srgbClr val="075985"/>
+                </a:solidFill>
+                <a:latin typeface="Calibri" pitchFamily="34" charset="0"/>
+                <a:ea typeface="Calibri" pitchFamily="34" charset="-122"/>
+                <a:cs typeface="Calibri" pitchFamily="34" charset="-120"/>
+              </a:rPr>
+              <a:t>DA COMPRENDERE OGGI</a:t>
+            </a:r>
+            <a:pPr indent="0" marL="0">
+              <a:buNone/>
+            </a:pPr>
+            <a:r>
+              <a:rPr lang="en-US" sz="1100" dirty="0">
+                <a:solidFill>
+                  <a:srgbClr val="075985"/>
+                </a:solidFill>
+                <a:latin typeface="Calibri" pitchFamily="34" charset="0"/>
+                <a:ea typeface="Calibri" pitchFamily="34" charset="-122"/>
+                <a:cs typeface="Calibri" pitchFamily="34" charset="-120"/>
+              </a:rPr>
+              <a:t> · ROM, flash, firmware</a:t>
+            </a:r>
+            <a:endParaRPr lang="en-US" sz="1100" dirty="0"/>
+          </a:p>
+        </p:txBody>
+      </p:sp>
+      <p:sp>
+        <p:nvSpPr>
           <p:cNvPr id="25" name="Slide Number Placeholder 0"/>
           <p:cNvSpPr>
             <a:spLocks noGrp="1"/>
@@ -17277,6 +19105,133 @@
       </p:sp>
       <p:sp>
         <p:nvSpPr>
+          <p:cNvPr id="14" name="Shape 12"/>
+          <p:cNvSpPr/>
+          <p:nvPr/>
+        </p:nvSpPr>
+        <p:spPr>
+          <a:xfrm>
+            <a:off x="8708212" y="91440"/>
+            <a:ext cx="2934843" cy="274320"/>
+          </a:xfrm>
+          <a:prstGeom prst="rect">
+            <a:avLst/>
+          </a:prstGeom>
+          <a:solidFill>
+            <a:srgbClr val="E0F2FE"/>
+          </a:solidFill>
+          <a:ln w="12700">
+            <a:solidFill>
+              <a:srgbClr val="0369A1"/>
+            </a:solidFill>
+            <a:prstDash val="solid"/>
+          </a:ln>
+        </p:spPr>
+      </p:sp>
+      <p:sp>
+        <p:nvSpPr>
+          <p:cNvPr id="15" name="Shape 13"/>
+          <p:cNvSpPr/>
+          <p:nvPr/>
+        </p:nvSpPr>
+        <p:spPr>
+          <a:xfrm>
+            <a:off x="8708212" y="91440"/>
+            <a:ext cx="73152" cy="274320"/>
+          </a:xfrm>
+          <a:prstGeom prst="rect">
+            <a:avLst/>
+          </a:prstGeom>
+          <a:solidFill>
+            <a:srgbClr val="0369A1"/>
+          </a:solidFill>
+          <a:ln w="12700">
+            <a:solidFill>
+              <a:srgbClr val="0369A1"/>
+            </a:solidFill>
+            <a:prstDash val="solid"/>
+          </a:ln>
+        </p:spPr>
+      </p:sp>
+      <p:pic>
+        <p:nvPicPr>
+          <p:cNvPr id="16" name="Image 0" descr="preencoded.png">    </p:cNvPr>
+          <p:cNvPicPr>
+            <a:picLocks noChangeAspect="1"/>
+          </p:cNvPicPr>
+          <p:nvPr/>
+        </p:nvPicPr>
+        <p:blipFill>
+          <a:blip r:embed="rId1"/>
+          <a:stretch>
+            <a:fillRect/>
+          </a:stretch>
+        </p:blipFill>
+        <p:spPr>
+          <a:xfrm>
+            <a:off x="8836228" y="128016"/>
+            <a:ext cx="201168" cy="201168"/>
+          </a:xfrm>
+          <a:prstGeom prst="rect">
+            <a:avLst/>
+          </a:prstGeom>
+        </p:spPr>
+      </p:pic>
+      <p:sp>
+        <p:nvSpPr>
+          <p:cNvPr id="17" name="Text 14"/>
+          <p:cNvSpPr txBox="1"/>
+          <p:nvPr/>
+        </p:nvSpPr>
+        <p:spPr>
+          <a:xfrm>
+            <a:off x="9092260" y="91440"/>
+            <a:ext cx="2514219" cy="274320"/>
+          </a:xfrm>
+          <a:prstGeom prst="rect">
+            <a:avLst/>
+          </a:prstGeom>
+          <a:noFill/>
+          <a:ln/>
+        </p:spPr>
+        <p:txBody>
+          <a:bodyPr wrap="square" lIns="0" tIns="0" rIns="0" bIns="0" rtlCol="0" anchor="ctr"/>
+          <a:lstStyle/>
+          <a:p>
+            <a:pPr indent="0" marL="0">
+              <a:buNone/>
+            </a:pPr>
+            <a:r>
+              <a:rPr lang="en-US" sz="1100" b="1" dirty="0">
+                <a:solidFill>
+                  <a:srgbClr val="075985"/>
+                </a:solidFill>
+                <a:latin typeface="Calibri" pitchFamily="34" charset="0"/>
+                <a:ea typeface="Calibri" pitchFamily="34" charset="-122"/>
+                <a:cs typeface="Calibri" pitchFamily="34" charset="-120"/>
+              </a:rPr>
+              <a:t>DA COMPRENDERE OGGI</a:t>
+            </a:r>
+            <a:pPr indent="0" marL="0">
+              <a:buNone/>
+            </a:pPr>
+            <a:r>
+              <a:rPr lang="en-US" sz="1100" dirty="0">
+                <a:solidFill>
+                  <a:srgbClr val="075985"/>
+                </a:solidFill>
+                <a:latin typeface="Calibri" pitchFamily="34" charset="0"/>
+                <a:ea typeface="Calibri" pitchFamily="34" charset="-122"/>
+                <a:cs typeface="Calibri" pitchFamily="34" charset="-120"/>
+              </a:rPr>
+              <a:t> · la cache</a:t>
+            </a:r>
+            <a:endParaRPr lang="en-US" sz="1100" dirty="0"/>
+          </a:p>
+        </p:txBody>
+      </p:sp>
+      <p:sp>
+        <p:nvSpPr>
           <p:cNvPr id="25" name="Slide Number Placeholder 0"/>
           <p:cNvSpPr>
             <a:spLocks noGrp="1"/>
@@ -18042,6 +19997,133 @@
               <a:t>solo su un miss</a:t>
             </a:r>
             <a:endParaRPr lang="en-US" sz="1250" dirty="0"/>
+          </a:p>
+        </p:txBody>
+      </p:sp>
+      <p:sp>
+        <p:nvSpPr>
+          <p:cNvPr id="20" name="Shape 18"/>
+          <p:cNvSpPr/>
+          <p:nvPr/>
+        </p:nvSpPr>
+        <p:spPr>
+          <a:xfrm>
+            <a:off x="8708212" y="91440"/>
+            <a:ext cx="2934843" cy="274320"/>
+          </a:xfrm>
+          <a:prstGeom prst="rect">
+            <a:avLst/>
+          </a:prstGeom>
+          <a:solidFill>
+            <a:srgbClr val="E0F2FE"/>
+          </a:solidFill>
+          <a:ln w="12700">
+            <a:solidFill>
+              <a:srgbClr val="0369A1"/>
+            </a:solidFill>
+            <a:prstDash val="solid"/>
+          </a:ln>
+        </p:spPr>
+      </p:sp>
+      <p:sp>
+        <p:nvSpPr>
+          <p:cNvPr id="21" name="Shape 19"/>
+          <p:cNvSpPr/>
+          <p:nvPr/>
+        </p:nvSpPr>
+        <p:spPr>
+          <a:xfrm>
+            <a:off x="8708212" y="91440"/>
+            <a:ext cx="73152" cy="274320"/>
+          </a:xfrm>
+          <a:prstGeom prst="rect">
+            <a:avLst/>
+          </a:prstGeom>
+          <a:solidFill>
+            <a:srgbClr val="0369A1"/>
+          </a:solidFill>
+          <a:ln w="12700">
+            <a:solidFill>
+              <a:srgbClr val="0369A1"/>
+            </a:solidFill>
+            <a:prstDash val="solid"/>
+          </a:ln>
+        </p:spPr>
+      </p:sp>
+      <p:pic>
+        <p:nvPicPr>
+          <p:cNvPr id="22" name="Image 0" descr="preencoded.png">    </p:cNvPr>
+          <p:cNvPicPr>
+            <a:picLocks noChangeAspect="1"/>
+          </p:cNvPicPr>
+          <p:nvPr/>
+        </p:nvPicPr>
+        <p:blipFill>
+          <a:blip r:embed="rId1"/>
+          <a:stretch>
+            <a:fillRect/>
+          </a:stretch>
+        </p:blipFill>
+        <p:spPr>
+          <a:xfrm>
+            <a:off x="8836228" y="128016"/>
+            <a:ext cx="201168" cy="201168"/>
+          </a:xfrm>
+          <a:prstGeom prst="rect">
+            <a:avLst/>
+          </a:prstGeom>
+        </p:spPr>
+      </p:pic>
+      <p:sp>
+        <p:nvSpPr>
+          <p:cNvPr id="23" name="Text 20"/>
+          <p:cNvSpPr txBox="1"/>
+          <p:nvPr/>
+        </p:nvSpPr>
+        <p:spPr>
+          <a:xfrm>
+            <a:off x="9092260" y="91440"/>
+            <a:ext cx="2514219" cy="274320"/>
+          </a:xfrm>
+          <a:prstGeom prst="rect">
+            <a:avLst/>
+          </a:prstGeom>
+          <a:noFill/>
+          <a:ln/>
+        </p:spPr>
+        <p:txBody>
+          <a:bodyPr wrap="square" lIns="0" tIns="0" rIns="0" bIns="0" rtlCol="0" anchor="ctr"/>
+          <a:lstStyle/>
+          <a:p>
+            <a:pPr indent="0" marL="0">
+              <a:buNone/>
+            </a:pPr>
+            <a:r>
+              <a:rPr lang="en-US" sz="1100" b="1" dirty="0">
+                <a:solidFill>
+                  <a:srgbClr val="075985"/>
+                </a:solidFill>
+                <a:latin typeface="Calibri" pitchFamily="34" charset="0"/>
+                <a:ea typeface="Calibri" pitchFamily="34" charset="-122"/>
+                <a:cs typeface="Calibri" pitchFamily="34" charset="-120"/>
+              </a:rPr>
+              <a:t>DA COMPRENDERE OGGI</a:t>
+            </a:r>
+            <a:pPr indent="0" marL="0">
+              <a:buNone/>
+            </a:pPr>
+            <a:r>
+              <a:rPr lang="en-US" sz="1100" dirty="0">
+                <a:solidFill>
+                  <a:srgbClr val="075985"/>
+                </a:solidFill>
+                <a:latin typeface="Calibri" pitchFamily="34" charset="0"/>
+                <a:ea typeface="Calibri" pitchFamily="34" charset="-122"/>
+                <a:cs typeface="Calibri" pitchFamily="34" charset="-120"/>
+              </a:rPr>
+              <a:t> · la cache</a:t>
+            </a:r>
+            <a:endParaRPr lang="en-US" sz="1100" dirty="0"/>
           </a:p>
         </p:txBody>
       </p:sp>
@@ -20098,6 +22180,133 @@
           </a:graphicData>
         </a:graphic>
       </p:graphicFrame>
+      <p:sp>
+        <p:nvSpPr>
+          <p:cNvPr id="4" name="Shape 1"/>
+          <p:cNvSpPr/>
+          <p:nvPr/>
+        </p:nvSpPr>
+        <p:spPr>
+          <a:xfrm>
+            <a:off x="8708212" y="91440"/>
+            <a:ext cx="2934843" cy="274320"/>
+          </a:xfrm>
+          <a:prstGeom prst="rect">
+            <a:avLst/>
+          </a:prstGeom>
+          <a:solidFill>
+            <a:srgbClr val="E0F2FE"/>
+          </a:solidFill>
+          <a:ln w="12700">
+            <a:solidFill>
+              <a:srgbClr val="0369A1"/>
+            </a:solidFill>
+            <a:prstDash val="solid"/>
+          </a:ln>
+        </p:spPr>
+      </p:sp>
+      <p:sp>
+        <p:nvSpPr>
+          <p:cNvPr id="5" name="Shape 2"/>
+          <p:cNvSpPr/>
+          <p:nvPr/>
+        </p:nvSpPr>
+        <p:spPr>
+          <a:xfrm>
+            <a:off x="8708212" y="91440"/>
+            <a:ext cx="73152" cy="274320"/>
+          </a:xfrm>
+          <a:prstGeom prst="rect">
+            <a:avLst/>
+          </a:prstGeom>
+          <a:solidFill>
+            <a:srgbClr val="0369A1"/>
+          </a:solidFill>
+          <a:ln w="12700">
+            <a:solidFill>
+              <a:srgbClr val="0369A1"/>
+            </a:solidFill>
+            <a:prstDash val="solid"/>
+          </a:ln>
+        </p:spPr>
+      </p:sp>
+      <p:pic>
+        <p:nvPicPr>
+          <p:cNvPr id="6" name="Image 0" descr="preencoded.png">    </p:cNvPr>
+          <p:cNvPicPr>
+            <a:picLocks noChangeAspect="1"/>
+          </p:cNvPicPr>
+          <p:nvPr/>
+        </p:nvPicPr>
+        <p:blipFill>
+          <a:blip r:embed="rId1"/>
+          <a:stretch>
+            <a:fillRect/>
+          </a:stretch>
+        </p:blipFill>
+        <p:spPr>
+          <a:xfrm>
+            <a:off x="8836228" y="128016"/>
+            <a:ext cx="201168" cy="201168"/>
+          </a:xfrm>
+          <a:prstGeom prst="rect">
+            <a:avLst/>
+          </a:prstGeom>
+        </p:spPr>
+      </p:pic>
+      <p:sp>
+        <p:nvSpPr>
+          <p:cNvPr id="7" name="Text 3"/>
+          <p:cNvSpPr txBox="1"/>
+          <p:nvPr/>
+        </p:nvSpPr>
+        <p:spPr>
+          <a:xfrm>
+            <a:off x="9092260" y="91440"/>
+            <a:ext cx="2514219" cy="274320"/>
+          </a:xfrm>
+          <a:prstGeom prst="rect">
+            <a:avLst/>
+          </a:prstGeom>
+          <a:noFill/>
+          <a:ln/>
+        </p:spPr>
+        <p:txBody>
+          <a:bodyPr wrap="square" lIns="0" tIns="0" rIns="0" bIns="0" rtlCol="0" anchor="ctr"/>
+          <a:lstStyle/>
+          <a:p>
+            <a:pPr indent="0" marL="0">
+              <a:buNone/>
+            </a:pPr>
+            <a:r>
+              <a:rPr lang="en-US" sz="1100" b="1" dirty="0">
+                <a:solidFill>
+                  <a:srgbClr val="075985"/>
+                </a:solidFill>
+                <a:latin typeface="Calibri" pitchFamily="34" charset="0"/>
+                <a:ea typeface="Calibri" pitchFamily="34" charset="-122"/>
+                <a:cs typeface="Calibri" pitchFamily="34" charset="-120"/>
+              </a:rPr>
+              <a:t>DA COMPRENDERE OGGI</a:t>
+            </a:r>
+            <a:pPr indent="0" marL="0">
+              <a:buNone/>
+            </a:pPr>
+            <a:r>
+              <a:rPr lang="en-US" sz="1100" dirty="0">
+                <a:solidFill>
+                  <a:srgbClr val="075985"/>
+                </a:solidFill>
+                <a:latin typeface="Calibri" pitchFamily="34" charset="0"/>
+                <a:ea typeface="Calibri" pitchFamily="34" charset="-122"/>
+                <a:cs typeface="Calibri" pitchFamily="34" charset="-120"/>
+              </a:rPr>
+              <a:t> · la cache</a:t>
+            </a:r>
+            <a:endParaRPr lang="en-US" sz="1100" dirty="0"/>
+          </a:p>
+        </p:txBody>
+      </p:sp>
       <p:sp>
         <p:nvSpPr>
           <p:cNvPr id="25" name="Slide Number Placeholder 0"/>

--- a/it/slides/16-Architettura_dei_Calcolatori-Memoria_Permanente.pptx
+++ b/it/slides/16-Architettura_dei_Calcolatori-Memoria_Permanente.pptx
@@ -126,32 +126,32 @@
   <p:extLst>
     <p:ext uri="{521415D9-36F7-43E2-AB2F-B90AF26B5E84}">
       <p14:sectionLst xmlns:p14="http://schemas.microsoft.com/office/powerpoint/2010/main">
-        <p14:section name="Apertura" id="{32a5e229-e23c-fd5f-7510-4dc9f29415f8}">
+        <p14:section name="Apertura" id="{9cb1d599-3568-cbb2-a868-0f482185e166}">
           <p14:sldIdLst>
             <p14:sldId id="256"/>
             <p14:sldId id="257"/>
           </p14:sldIdLst>
         </p14:section>
-        <p14:section name="I componenti di un calcolatore" id="{dc0ad700-134a-53a0-e37f-10da8435a12d}">
+        <p14:section name="I componenti di un calcolatore" id="{72d5e236-2229-15bb-c4aa-6447d861bd7e}">
           <p14:sldIdLst>
             <p14:sldId id="258"/>
             <p14:sldId id="259"/>
           </p14:sldIdLst>
         </p14:section>
-        <p14:section name="Memorie non volatili" id="{da379117-7074-6908-ff1b-ea48b94d1a8d}">
+        <p14:section name="Memorie non volatili" id="{53adfb85-fa87-7754-0ea3-91ce561e0879}">
           <p14:sldIdLst>
             <p14:sldId id="260"/>
             <p14:sldId id="261"/>
           </p14:sldIdLst>
         </p14:section>
-        <p14:section name="La cache" id="{6784bb61-8e0b-f696-b7ba-39c51c8d2759}">
+        <p14:section name="La cache" id="{f41732cd-4734-a388-87f2-8eb83653c9fc}">
           <p14:sldIdLst>
             <p14:sldId id="262"/>
             <p14:sldId id="263"/>
             <p14:sldId id="264"/>
           </p14:sldIdLst>
         </p14:section>
-        <p14:section name="La memoria secondaria" id="{01df9f52-5106-c23e-7933-041955d48922}">
+        <p14:section name="La memoria secondaria" id="{f403bd63-d1e4-41ff-eab8-0acc9af10833}">
           <p14:sldIdLst>
             <p14:sldId id="265"/>
             <p14:sldId id="266"/>
@@ -159,13 +159,13 @@
             <p14:sldId id="268"/>
           </p14:sldIdLst>
         </p14:section>
-        <p14:section name="Dischi ottici" id="{c21b1555-735c-8387-49f0-10b35d983e27}">
+        <p14:section name="Dischi ottici" id="{3ffa2bfa-a0bd-bf61-c94f-9c2e48e99632}">
           <p14:sldIdLst>
             <p14:sldId id="269"/>
             <p14:sldId id="270"/>
           </p14:sldIdLst>
         </p14:section>
-        <p14:section name="La memoria di massa a più livelli" id="{8962e7cd-b309-b56a-33ec-1c565d88746e}">
+        <p14:section name="La memoria di massa a più livelli" id="{754d86d0-346b-e506-f220-85acf7aaed3e}">
           <p14:sldIdLst>
             <p14:sldId id="271"/>
             <p14:sldId id="272"/>

--- a/it/slides/16-Architettura_dei_Calcolatori-Memoria_Permanente.pptx
+++ b/it/slides/16-Architettura_dei_Calcolatori-Memoria_Permanente.pptx
@@ -126,32 +126,32 @@
   <p:extLst>
     <p:ext uri="{521415D9-36F7-43E2-AB2F-B90AF26B5E84}">
       <p14:sectionLst xmlns:p14="http://schemas.microsoft.com/office/powerpoint/2010/main">
-        <p14:section name="Apertura" id="{9cb1d599-3568-cbb2-a868-0f482185e166}">
+        <p14:section name="Apertura" id="{84537771-1ff4-bc1d-b123-912c33535cad}">
           <p14:sldIdLst>
             <p14:sldId id="256"/>
             <p14:sldId id="257"/>
           </p14:sldIdLst>
         </p14:section>
-        <p14:section name="I componenti di un calcolatore" id="{72d5e236-2229-15bb-c4aa-6447d861bd7e}">
+        <p14:section name="I componenti di un calcolatore" id="{769c6f48-9f4f-8bdb-e666-bb7d529be47d}">
           <p14:sldIdLst>
             <p14:sldId id="258"/>
             <p14:sldId id="259"/>
           </p14:sldIdLst>
         </p14:section>
-        <p14:section name="Memorie non volatili" id="{53adfb85-fa87-7754-0ea3-91ce561e0879}">
+        <p14:section name="Memorie non volatili" id="{27835e83-7da1-0fa7-d729-4efb3104f2c8}">
           <p14:sldIdLst>
             <p14:sldId id="260"/>
             <p14:sldId id="261"/>
           </p14:sldIdLst>
         </p14:section>
-        <p14:section name="La cache" id="{f41732cd-4734-a388-87f2-8eb83653c9fc}">
+        <p14:section name="La cache" id="{f5db51bb-2f08-fbf3-f284-20332a5c1dbc}">
           <p14:sldIdLst>
             <p14:sldId id="262"/>
             <p14:sldId id="263"/>
             <p14:sldId id="264"/>
           </p14:sldIdLst>
         </p14:section>
-        <p14:section name="La memoria secondaria" id="{f403bd63-d1e4-41ff-eab8-0acc9af10833}">
+        <p14:section name="La memoria secondaria" id="{4b079192-dcb5-3e1d-12b6-fb041e85c3bc}">
           <p14:sldIdLst>
             <p14:sldId id="265"/>
             <p14:sldId id="266"/>
@@ -159,13 +159,13 @@
             <p14:sldId id="268"/>
           </p14:sldIdLst>
         </p14:section>
-        <p14:section name="Dischi ottici" id="{3ffa2bfa-a0bd-bf61-c94f-9c2e48e99632}">
+        <p14:section name="Dischi ottici" id="{6e269f4a-d4c5-4746-6cbc-ce80adca4bf9}">
           <p14:sldIdLst>
             <p14:sldId id="269"/>
             <p14:sldId id="270"/>
           </p14:sldIdLst>
         </p14:section>
-        <p14:section name="La memoria di massa a più livelli" id="{754d86d0-346b-e506-f220-85acf7aaed3e}">
+        <p14:section name="La memoria di massa a più livelli" id="{c8118a14-08d4-cdf2-7eb4-597bdf843951}">
           <p14:sldIdLst>
             <p14:sldId id="271"/>
             <p14:sldId id="272"/>
@@ -578,7 +578,7 @@
           <a:p>
             <a:r>
               <a:rPr lang="en-US" dirty="0"/>
-              <a:t>La lezione precedente trattava la memoria che dimentica quando manca la corrente. Questa tratta le memorie che non dimenticano: i chip che contengono il firmware, i dischi, i supporti ottici, i nastri. Tra le due colloca la cache, una memoria piccola e veloce che nasconde la lentezza di una grande. La citazione è di un professore di calcolo numerico di questo Ateneo, e ogni studente prima o poi ne impara la verità: un dato non esiste se non è stato salvato.
+              <a:t>La lezione precedente ha trattato la memoria che dimentica quando si toglie l'alimentazione. Questa tratta le memorie che non dimenticano: i chip che contengono il firmware, i dischi magnetici, i supporti ottici e i nastri. Tra le due colloca la cache, una piccola memoria veloce che nasconde la lentezza di una grande, e l'idea che unifica la lezione è che questa stessa strategia ricorre a ogni scala. La citazione è di un professore di calcolo numerico di questo Ateneo, e ogni studente prima o poi ne impara la verità: un dato non esiste finché non è stato salvato.
 Stato di apprendimento: DA COMPRENDERE OGGI, alla fine di questa lezione lo spiegate, lo seguite passo passo e lo applicate da soli; DA UTILIZZARE OGGI, oggi seguite e usate la ricetta; come funziona dentro si spiega più avanti, o non fa parte del corso; DA COMPRENDERE PIÙ AVANTI, riconoscete il nome e lo scopo; lo spiega una lezione successiva. Una slide senza etichetta è contesto: una storia, un esempio, una domanda, un esercizio.
 Stato di apprendimento di questa lezione. DA COMPRENDERE OGGI: ROM, flash, firmware; l'architettura di von Neumann; la cache; la memoria secondaria. DA UTILIZZARE OGGI: il programma completo, gli strumenti di PRG32 (si usa, non si studia, in questo corso). DA COMPRENDERE PIÙ AVANTI: niente. Una slide senza etichetta è contesto: una storia, un esempio, una domanda, un esercizio.
 Per il docente: Spirale: una cartuccia conserva la stringa del titolo dopo uno spegnimento ma perde il punteggio migliore; la lezione spiega dove vive ciascuno, poi tratta ROM e flash, la cache, e la memoria di massa.</a:t>
@@ -669,7 +669,7 @@
           <a:p>
             <a:r>
               <a:rPr lang="en-US" dirty="0"/>
-              <a:t>Quattro proprietà definiscono le memorie secondarie rispetto alla memoria centrale. Sono non volatili. La loro capacità è di diversi ordini di grandezza maggiore. Il loro costo per bit è di diversi ordini di grandezza minore. E il loro accesso è di alcuni ordini di grandezza più lento. Altri due fatti riguardano l'organizzazione: l'informazione è memorizzata a blocchi, non a byte singoli, e alcuni supporti permettono l'accesso diretto a qualunque blocco mentre altri, come i nastri, solo l'accesso sequenziale.
+              <a:t>Quattro proprietà caratterizzano le memorie secondarie rispetto alla memoria centrale. Non sono volatili. La loro capacità è di diversi ordini di grandezza maggiore, e il loro costo per bit di diversi ordini di grandezza minore. Il loro accesso è di alcuni ordini di grandezza più lento. Due ulteriori fatti ne riguardano l'organizzazione: l'informazione si memorizza a blocchi, non per singoli byte, e alcuni supporti permettono l'accesso diretto a qualsiasi blocco mentre altri, come il nastro, solo l'accesso sequenziale.
 DA COMPRENDERE OGGI: la memoria secondaria.
 Per il docente: La memoria secondaria memorizza e conserva tutti i programmi e i dati del calcolatore; la memoria centrale contiene i programmi in esecuzione e i dati che servono loro.
 Immagini: Open hard-drive.jpg, Zzubnik, Public domain, Wikimedia Commons.</a:t>
@@ -760,7 +760,7 @@
           <a:p>
             <a:r>
               <a:rPr lang="en-US" dirty="0"/>
-              <a:t>La geometria di un disco magnetico. Piatti rivestiti di materiale magnetizzabile ruotano a velocità costante, e delle testine leggono e scrivono. La superficie è divisa in tracce concentriche e in settori, spicchi come quelli di una torta. Un settore taglia ogni traccia in blocchi, e il blocco, identificato da traccia e settore, è la più piccola unità indirizzabile. La formattazione è l'operazione che traccia questa divisione. L'accesso è diretto: la testina va su qualunque blocco senza passare su tutti i precedenti.
+              <a:t>La geometria di un disco magnetico. Piatti rivestiti di un materiale magnetizzabile ruotano a velocità costante, mentre delle testine leggono e scrivono. La superficie è divisa in tracce concentriche e in settori, regioni a spicchio. Un settore divide ogni traccia in blocchi, e il blocco, identificato dalla sua traccia e dal suo settore, è la più piccola unità indirizzabile. La formattazione è l'operazione che stabilisce questa divisione. L'accesso è diretto: la testina può raggiungere qualsiasi blocco senza attraversare tutti quelli che lo precedono.
 DA COMPRENDERE OGGI: la memoria secondaria.
 Per il docente: Più settori formano un cluster; le tracce allo stesso raggio su tutti i piatti formano un cilindro. La figura originale è stata ridisegnata.</a:t>
             </a:r>
@@ -850,7 +850,7 @@
           <a:p>
             <a:r>
               <a:rPr lang="en-US" dirty="0"/>
-              <a:t>Il tempo di accesso di un disco è la somma di tre tempi. Tempo di posizionamento: quello per spostare la testina in senso radiale sulla traccia giusta. Latenza: l'attesa che il settore desiderato passi sotto la testina, che dipende dalla velocità di rotazione. Tempo di trasferimento: quello perché il blocco passi sotto la testina. Il totale è questione di millisecondi: un milione di volte più lento della RAM. Nel tempo di un accesso al disco il processore del kit potrebbe eseguire più di centomila istruzioni.
+              <a:t>Il tempo di accesso di un disco è la somma di tre componenti. Il tempo di ricerca: il tempo per spostare radialmente la testina sulla traccia giusta. La latenza rotazionale: l'attesa che il settore desiderato arrivi sotto la testina, che dipende dalla velocità di rotazione. Il tempo di trasferimento: il tempo perché il blocco passi sotto la testina. Il totale è dell'ordine dei millisecondi, circa un milione di volte più lento della RAM: durante un accesso al disco il processore del kit potrebbe eseguire più di centomila istruzioni. Il divario spiega perché i sistemi operativi si impegnano tanto a evitare gli accessi al disco.
 DA COMPRENDERE OGGI: la memoria secondaria.
 Per il docente: Un millisecondo è un milione di nanosecondi: durante un accesso al disco un processore a 160 MHz potrebbe eseguire più di centomila istruzioni.</a:t>
             </a:r>
@@ -940,7 +940,7 @@
           <a:p>
             <a:r>
               <a:rPr lang="en-US" dirty="0"/>
-              <a:t>Due tecnologie per lo stesso lavoro. Un disco rigido ha piatti magnetici e testine mobili: il suo tempo di accesso è dominato dalla meccanica, ma il costo per terabyte è il più basso, e resta la scelta per grandi archivi e backup. Un disco a stato solido è memoria flash con un controllore e nessuna parte mobile: il suo tempo di accesso è di decine di microsecondi, ed è la memoria di massa standard di portatili e telefoni. È la stessa tecnologia del chip flash del kit.
+              <a:t>Due tecnologie che servono lo stesso scopo. Un disco rigido ha piatti magnetici e testine in movimento; il suo tempo di accesso è dominato dalla meccanica, ma il suo costo per terabyte è il più basso disponibile, e resta la scelta per grandi archivi e copie di sicurezza. Un disco a stato solido è memoria flash con un controllore e senza parti in movimento; il suo tempo di accesso è dell'ordine delle decine di microsecondi, ed è la memorizzazione standard di portatili e telefoni. Usa la stessa tecnologia del chip di flash del kit.
 DA COMPRENDERE OGGI: la memoria secondaria.
 Per il docente: Novità rispetto alla presentazione originale, che citava gli SSD solo tra i livelli di memoria di massa. Il bus ATA parallelo dei vecchi PC ha ceduto il posto al Serial ATA e poi a NVMe.</a:t>
             </a:r>
@@ -1030,7 +1030,7 @@
           <a:p>
             <a:r>
               <a:rPr lang="en-US" dirty="0"/>
-              <a:t>Un disco ottico è letto da un raggio laser la cui riflessione cambia tra le cavità, i pit, e la superficie piana, il land. Il punto che all'esame viene sempre chiesto: 0 e 1 non sono pit e land. Un 1 è un cambiamento, da pit a land o da land a pit; uno 0 è nessun cambiamento. Questi dischi di solito si scrivono una volta sola, perché la modifica fisica è irreversibile, e questo li rende adatti a distribuire programmi e ad archivi che non devono essere alterati.
+              <a:t>Un disco ottico si legge con un fascio laser il cui riflesso cambia tra le buche e la superficie piana, la land. Un punto viene immancabilmente chiesto all'esame: 0 e 1 non corrispondono a buca e land. Un 1 è una transizione, da buca a land o da land a buca; uno 0 è l'assenza di transizione. Questi dischi si scrivono di solito una volta sola, perché la modifica fisica è irreversibile, il che li rende adatti a distribuire software e ad archivi che non devono essere alterati.
 DA COMPRENDERE OGGI: la memoria secondaria.
 Per il docente: Codificare un 1 come transizione è un'idea autosincronizzante, usata anche in molti collegamenti seriali.
 Immagini: CD-ROM pressed pits.jpg, Tycho, CC0, Wikimedia Commons.</a:t>
@@ -1121,7 +1121,7 @@
           <a:p>
             <a:r>
               <a:rPr lang="en-US" dirty="0"/>
-              <a:t>In un compact disc l'informazione sta su un'unica traccia a spirale, con una distanza di 1,6 micrometri tra una spira e la successiva. La densità di registrazione è costante lungo la spirale, quindi per leggere a ritmo costante il disco deve girare più in fretta vicino al centro e più lentamente vicino al bordo: è la velocità lineare costante. L'alternativa, la velocità angolare costante, tiene costante la rotazione e spreca la parte esterna del disco. La velocità fu fissata in origine dalle esigenze della musica.
+              <a:t>Su un compact disc l'informazione si trova su un'unica traccia a spirale, con 1,6 micrometri tra una spira e la successiva. La densità di registrazione è costante lungo la spirale, quindi per leggere a velocità costante il disco deve girare più in fretta vicino al centro e più lentamente vicino al bordo: è la velocità lineare costante. L'alternativa, la velocità angolare costante, mantiene fissa la rotazione e spreca capacità nella regione esterna. La velocità originaria fu dettata dalle esigenze della riproduzione audio.
 DA COMPRENDERE OGGI: la memoria secondaria.
 Per il docente: 1x = 1,2 m/s. CD registrabile: due strati di policarbonato racchiudono un sottile foglio riflettente coperto da un colorante traslucido.
 Immagini: CD Player focusing lens assembly.jpg, Zim 256, CC BY-SA 3.0, Wikimedia Commons.</a:t>
@@ -1212,7 +1212,7 @@
           <a:p>
             <a:r>
               <a:rPr lang="en-US" dirty="0"/>
-              <a:t>Cinque livelli di memoria permanente, dal più veloce al più economico: un RAM disk, che è un pezzo di memoria centrale usato come disco; i dischi a stato solido; i dischi rigidi; le librerie di dischi, in cui alcuni dischi sono accesi solo quando servono; e le librerie a nastri, in cui dei robot montano i nastri. Il sistema sposta i dati in automatico: ciò che si usa spesso migra verso i livelli veloci, il resto scende verso quelli economici. È l'idea della cache, applicata alla memoria di massa.
+              <a:t>Cinque livelli di memoria permanente, dal più veloce al più economico: un RAM disk, una porzione di memoria centrale usata come disco; i dischi a stato solido; i dischi rigidi; le librerie di dischi, in cui alcuni dischi si alimentano solo quando servono; e le librerie di nastri, in cui dei robot montano i nastri. Il sistema sposta i dati automaticamente: i dati usati spesso migrano verso i livelli veloci, il resto scende verso quelli economici. È il principio della cache, applicato alla memorizzazione, e la lezione si chiude così sull'idea con cui era cominciata.
 DA COMPRENDERE OGGI: la memoria secondaria.
 Per il docente: La stessa idea della cache, applicata alla memoria di massa. Lo storage HPC del Dipartimento funziona così (visita alla fine del corso).</a:t>
             </a:r>
@@ -1302,8 +1302,8 @@
           <a:p>
             <a:r>
               <a:rPr lang="en-US" dirty="0"/>
-              <a:t>Scorrete la tabella delle memorie non volatili facendovi due domande per ciascuna: come si cancella, e quanto alla volta? Solo una si cancella elettricamente e a blocchi.
-Un miss non è un errore. Il programma non si accorge di nulla, se non che questo accesso dura di più: il dato viene prelevato dalla memoria centrale e tenuto nella cache insieme ai suoi vicini.
+              <a:t>Per la prima domanda ogni voce della tabella delle memorie non volatili si esamina con due domande: come si cancella, e in quale quantità alla volta? Una sola si cancella elettricamente e a blocchi.
+Per la seconda: un miss non è un errore. Il programma non osserva nulla oltre a un accesso più lungo: il dato viene prelevato dalla memoria centrale e conservato nella cache insieme ai suoi vicini.
 Per il docente: 1. Risposta: D. La flash è l'evoluzione a blocchi della EEPROM. Alla EPROM serve la luce ultravioletta; ROM e PROM non si possono cancellare.
 2. Risposta: B. L'accesso è semplicemente più lento: il blocco che contiene l'indirizzo viene caricato nella cache, scommettendo che presto serviranno indirizzi vicini.</a:t>
             </a:r>
@@ -1393,8 +1393,8 @@
           <a:p>
             <a:r>
               <a:rPr lang="en-US" dirty="0"/>
-              <a:t>Quale dei tre tempi è un'attesa che il disco giri? Il movimento del braccio non dipende dalla rotazione; formattazione e avvio non sono componenti del tempo di accesso.
-Ricordate la regola dei dischi ottici: non conta il pit o il land, ma il passaggio dall'uno all'altro.
+              <a:t>Per la prima domanda ci si chiede quale delle tre componenti sia un'attesa che il disco ruoti. Il movimento del braccio non dipende dalla rotazione, e formattazione e avvio non sono componenti del tempo di accesso.
+Per la seconda vale la regola dei dischi ottici: ciò che conta non è la buca o la land ma la transizione tra di esse.
 Per il docente: 1. Risposta: B. La latenza è l'attesa che il settore arrivi sotto la testina; il tempo di posizionamento dipende dal movimento del braccio.
 2. Risposta: C. Un cambio di riflettività, in un verso o nell'altro, è un 1; nessun cambio è uno 0.</a:t>
             </a:r>
@@ -1484,7 +1484,7 @@
           <a:p>
             <a:r>
               <a:rPr lang="en-US" dirty="0"/>
-              <a:t>Dieci termini. Motherboard è la scheda madre. Hit e miss di cache sono il successo e il fallimento nel trovare il dato. Seek time e latency, tempo di posizionamento e latenza, sono due componenti del tempo di accesso di un disco. Mass storage è la memoria di massa, cioè la memoria secondaria nel suo insieme. Una tape library è un sistema di memoria a nastri gestiti da robot.</a:t>
+              <a:t>Dieci termini. La motherboard è la scheda madre. Un hit e un miss della cache indicano il successo e l'insuccesso nel trovare il dato. Seek time e latency sono due componenti del tempo di accesso di un disco. La mass storage indica la memoria secondaria nel suo insieme. Una tape library è un sistema di memorizzazione con nastri movimentati da robot.</a:t>
             </a:r>
             <a:endParaRPr lang="en-US" dirty="0"/>
           </a:p>
@@ -1572,7 +1572,7 @@
           <a:p>
             <a:r>
               <a:rPr lang="en-US" dirty="0"/>
-              <a:t>Sei obiettivi. Nominare le unità funzionali di un calcolatore e trovarle su una scheda madre e sul kit. Distinguere ROM, PROM, EPROM, EEPROM e flash, e dire che cos'è il firmware. Spiegare perché una cache rende più veloce un calcolatore, e che cos'è un miss. Descrivere tracce, settori e blocchi di un disco magnetico e le componenti del suo tempo di accesso. Spiegare come un disco ottico memorizza i bit, e come si legge un compact disc. E collocare flash, dischi a stato solido, dischi rigidi e nastri in un sistema di memoria a più livelli.</a:t>
+              <a:t>Sei risultati di apprendimento. Nominare le unità funzionali di un calcolatore e individuarle su una scheda madre e sul kit. Distinguere ROM, PROM, EPROM, EEPROM e flash, e dire che cos'è il firmware. Spiegare perché una cache rende più veloce un calcolatore, e che cos'è un miss. Descrivere tracce, settori e blocchi di un disco magnetico e le componenti del suo tempo di accesso. Spiegare come un disco ottico memorizza i bit e come si legge un compact disc. E collocare flash, dischi a stato solido, dischi rigidi e nastri in un sistema di memorizzazione a più livelli.</a:t>
             </a:r>
             <a:endParaRPr lang="en-US" dirty="0"/>
           </a:p>
@@ -1660,7 +1660,7 @@
           <a:p>
             <a:r>
               <a:rPr lang="en-US" dirty="0"/>
-              <a:t>Cinque conclusioni. Le memorie non volatili contengono di solito il firmware, il software di base di una macchina. La cache migliora le prestazioni tenendo vicino al processore una copia di parte della memoria centrale. La stessa idea, un livello piccolo e veloce davanti a uno grande e lento, si riusa nella memoria di massa. Le memorie permanenti possono essere a semiconduttore, magnetiche o ottiche. E un sistema moderno ha più livelli, gestiti in automatico. Ora viene la Parte 3 di Verm1, che usa la memoria come finora nel progetto non era mai stata usata.
+              <a:t>Cinque conclusioni. Le memorie non volatili contengono tipicamente il firmware, il software di base di una macchina. La cache migliora le prestazioni tenendo una copia di parte della memoria centrale vicino al processore. La stessa idea, un livello piccolo e veloce davanti a uno grande e lento, ricorre nei sistemi di memorizzazione. Le memorie permanenti possono essere a semiconduttore, magnetiche od ottiche. E un sistema moderno comprende più livelli, gestiti automaticamente. Segue la Parte 3 di Verm1, che usa la memoria come il progetto non l'ha ancora usata.
 Stato di apprendimento, riepilogo. DA COMPRENDERE OGGI: ROM, flash, firmware; l'architettura di von Neumann; la cache; la memoria secondaria. DA UTILIZZARE OGGI: il programma completo, gli strumenti di PRG32 (si usa, non si studia, in questo corso). DA COMPRENDERE PIÙ AVANTI: niente. Una slide senza etichetta è contesto: una storia, un esempio, una domanda, un esercizio.
 Per il docente: A seguire: Verm1, parte 3: un corpo, regole e stati. Poi il processore.</a:t>
             </a:r>
@@ -1750,7 +1750,7 @@
           <a:p>
             <a:r>
               <a:rPr lang="en-US" dirty="0"/>
-              <a:t>Sei riquadri: il processore, la memoria centrale, la memoria secondaria, i dispositivi di ingresso e uscita, le linee di comunicazione, e un'osservazione sul contenitore. Ogni riquadro nomina l'unità e poi dice dove sta sul kit: il core RISC-V, i 512 KB di SRAM, il chip flash, il display con joystick e amplificatore. L'ultimo riquadro è la differenza tra un PC e un microcontrollore: il primo distribuisce le unità su una scheda madre, il secondo le mette quasi tutte in un solo contenitore.
+              <a:t>Sei schede: il processore, la memoria centrale, la memoria secondaria, i dispositivi di ingresso e uscita, le linee di comunicazione, e un'osservazione sull'integrazione fisica. Ogni scheda nomina l'unità e la individua sul kit: il core RISC-V, i 512 KB di SRAM, il chip di flash, il display con il suo joystick e l'amplificatore. L'ultima scheda dice la differenza tra un PC e un microcontrollore: il primo distribuisce le unità su una scheda madre, il secondo le integra quasi tutte in un solo contenitore.
 DA COMPRENDERE OGGI: l'architettura di von Neumann.</a:t>
             </a:r>
             <a:endParaRPr lang="en-US" dirty="0"/>
@@ -1839,7 +1839,7 @@
           <a:p>
             <a:r>
               <a:rPr lang="en-US" dirty="0"/>
-              <a:t>Il firmware è il software di base conservato in una memoria non volatile. In un PC si chiamava BIOS e faceva quattro lavori: provare i dispositivi all'accensione, configurarli, avviare il sistema operativo, e offrire funzioni di base per tastiera e dischi; oggi il suo erede si chiama UEFI. Il kit ha una catena simile: un piccolo programma in ROM lancia un bootloader in flash, che lancia il firmware PRG32, che carica la cartuccia scelta. Ogni stadio trova, controlla e avvia il successivo.
+              <a:t>Il firmware è il software di base contenuto in una memoria non volatile. In un PC si chiamava BIOS e svolgeva quattro compiti: verificare i dispositivi all'accensione, configurarli, avviare il sistema operativo, e offrire servizi elementari per tastiera e dischi; il suo successore contemporaneo è UEFI. Il kit ha una catena analoga: un piccolo programma in ROM avvia un bootloader in flash, che avvia il firmware di PRG32, che carica la cartuccia scelta. Ogni stadio individua, verifica e avvia il successivo, una struttura nota come catena di avvio.
 DA COMPRENDERE OGGI: ROM, flash, firmware.
 Per il docente: Ogni stadio trova, controlla e avvia il successivo: una catena che termina con la prima istruzione di first_init.</a:t>
             </a:r>
@@ -1929,7 +1929,7 @@
           <a:p>
             <a:r>
               <a:rPr lang="en-US" dirty="0"/>
-              <a:t>Leggete la tabella dall'alto in basso come una storia della comodità. Una ROM è scritta dal costruttore una volta per tutte. Una PROM può essere scritta dall'utente, una volta. Una EPROM si può cancellare, tutta insieme, esponendola alla luce ultravioletta attraverso una finestrella, e riscrivere. Una EEPROM si cancella elettricamente, un byte alla volta, senza rimuoverla. La flash si cancella elettricamente a blocchi: meno flessibile della EEPROM, ma molto più economica, e oggi è ovunque.
+              <a:t>La tabella, letta dall'alto in basso, è una storia di comodità crescente. Una ROM è scritta dal fabbricante una volta per tutte. Una PROM può essere scritta dall'utente, una volta. Una EPROM si può cancellare per intero esponendola alla luce ultravioletta attraverso una finestrella, e poi riscrivere. Una EEPROM si cancella elettricamente, un byte alla volta, senza toglierla dal circuito. La flash si cancella elettricamente a blocchi: meno flessibile della EEPROM, ma molto più economica per bit, e oggi onnipresente.
 DA COMPRENDERE OGGI: ROM, flash, firmware.
 Per il docente: Read-only memory, memoria di sola lettura; programmable ROM; erasable PROM; electrically erasable PROM. Tempo di accesso dell'ordine dei nanosecondi in lettura. EEPROM e flash sono più lente e, per bit, erano un tempo più care della RAM; la flash è oggi la memoria a semiconduttore più economica.</a:t>
             </a:r>
@@ -2019,7 +2019,7 @@
           <a:p>
             <a:r>
               <a:rPr lang="en-US" dirty="0"/>
-              <a:t>Tre proprietà della flash spiegano come la si usa. Si cancella a blocchi, non a byte singoli: cancellare porta a 1 tutti i bit di un blocco, e scrivere può solo trasformare degli 1 in 0. Ogni blocco sopporta un numero limitato di cancellazioni, quindi un controllore distribuisce le scritture in modo uniforme. E la lettura è veloce, mentre la scrittura e soprattutto la cancellazione sono lente. Ecco perché il punteggio migliore del riscaldamento non viene semplicemente scritto nella cartuccia a ogni frame: la flash non è un posto per le variabili.
+              <a:t>Tre proprietà della flash ne determinano l'uso. Si cancella a blocchi, non per singoli byte: la cancellazione porta a 1 ogni bit di un blocco, e la scrittura può solo trasformare gli 1 in 0. Ogni blocco sopporta un numero limitato di cancellazioni, quindi un controllore distribuisce uniformemente le scritture, una tecnica chiamata wear levelling. E la lettura è veloce, mentre la scrittura, e soprattutto la cancellazione, sono lente. È per questo che il punteggio migliore del riscaldamento non viene semplicemente scritto nella cartuccia a ogni frame: la flash non è un supporto per variabili.
 DA COMPRENDERE OGGI: ROM, flash, firmware.
 Per il docente: Ecco perché il punteggio migliore del riscaldamento non viene semplicemente riscritto nella cartuccia a ogni frame: la flash non è un posto per le variabili.
 Immagini: Pair of BIOS chips.jpg, Jud McCranie, CC BY-SA 4.0, Wikimedia Commons.</a:t>
@@ -2110,7 +2110,7 @@
           <a:p>
             <a:r>
               <a:rPr lang="en-US" dirty="0"/>
-              <a:t>Mentre la memoria viene letta o scritta il processore aspetta, e più la memoria è lenta più cicli di clock si perdono. Perché non fare tutta la memoria veloce quanto i registri? Perché dovrebbe stare sullo stesso chip del processore, e allora non potrebbe essere grande. Il compromesso: una memoria piccola e veloce sul chip del processore, e una più grande e più lenta raggiunta attraverso il bus.
+              <a:t>Mentre la memoria viene letta o scritta il processore attende, e più la memoria è lenta, più cicli di clock si perdono. Perché non rendere tutta la memoria veloce quanto i registri? Perché dovrebbe allora risiedere sullo stesso chip del processore, il che impedisce di renderla grande. Il compromesso è una memoria piccola e veloce sul chip del processore e una più grande e lenta raggiunta attraverso il bus, che è la gerarchia di memoria della Lezione 15 ridotta ai suoi due livelli superiori.
 DA COMPRENDERE OGGI: la cache.
 Per il docente: La domanda della slide originale: perché non costruire memorie veloci quanto i registri della CPU?</a:t>
             </a:r>
@@ -2200,7 +2200,7 @@
           <a:p>
             <a:r>
               <a:rPr lang="en-US" dirty="0"/>
-              <a:t>La cache sta tra il processore e la memoria centrale. A ogni accesso il processore guarda prima nella cache. Se il contenuto dell'indirizzo richiesto c'è, è un hit e il dato arriva subito. Se non c'è, è un miss: il dato viene copiato dalla memoria centrale nella cache, insieme a un certo numero di locazioni vicine. La scommessa che sta dietro è il principio di località: un programma che ha appena usato un indirizzo probabilmente userà di nuovo presto quello, o i suoi vicini. La ragione sono i cicli e i vettori.
+              <a:t>La cache si colloca tra il processore e la memoria centrale. A ogni accesso il processore guarda prima nella cache. Se il contenuto dell'indirizzo richiesto è presente, l'accesso è un hit e il dato arriva subito. Se non lo è, l'accesso è un miss: il dato viene copiato dalla memoria centrale nella cache, insieme a un certo numero di locazioni vicine, che formano una linea di cache. La scommessa alla base del progetto è il principio di località: un programma che ha appena usato un indirizzo è probabile che lo usi di nuovo presto, o che usi i suoi vicini. I cicli sono la fonte della località temporale, gli array di quella spaziale.
 DA COMPRENDERE OGGI: la cache.
 Per il docente: Il principio di località: un programma che ha appena usato un indirizzo probabilmente lo userà di nuovo presto (località temporale) e probabilmente userà i suoi vicini (località spaziale). La ragione sono i cicli e i vettori.</a:t>
             </a:r>
@@ -2290,7 +2290,7 @@
           <a:p>
             <a:r>
               <a:rPr lang="en-US" dirty="0"/>
-              <a:t>Numeri tipici. Un PC ha più livelli di cache: un primo livello di decine di kilobyte dentro ogni core, un secondo di centinaia di kilobyte, e un terzo di megabyte condiviso dai core. L'ultima colonna è il kit: nessuna cache davanti alla sua SRAM, perché quella memoria è già veloce quanto serve al core; solo la flash esterna si legge attraverso una piccola cache. Il confronto fra le tre colonne mostra anche quanto sono cresciute memoria centrale e memoria di massa in vent'anni.
+              <a:t>Cifre rappresentative. Un PC ha più livelli di cache: un primo livello di decine di kilobyte dentro ogni core, un secondo di centinaia di kilobyte, e un terzo di megabyte condiviso tra i core. L'ultima colonna è il kit: nessuna cache davanti alla sua SRAM, che è già veloce quanto il core richiede, e solo la flash esterna è letta attraverso una piccola cache. Il confronto tra le colonne mostra anche quanto sono cresciute memoria centrale e memorizzazione in vent'anni.
 DA COMPRENDERE OGGI: la cache.
 Per il docente: Primo livello (interno): mantiene un flusso continuo dentro il processore. Secondo livello: limita il rallentamento dovuto alla memoria centrale. Terzo livello (da 8 a 32 MB e oltre): condiviso dai core dello stesso processore. Le cache sono fatte di SRAM. Sull'ESP32-C6 la SRAM è già veloce quanto serve al core; solo la flash esterna sta dietro una cache.</a:t>
             </a:r>
@@ -3370,7 +3370,7 @@
                 <a:ea typeface="Calibri" pitchFamily="34" charset="-122"/>
                 <a:cs typeface="Calibri" pitchFamily="34" charset="-120"/>
               </a:rPr>
-              <a:t>16-Architettura_dei_Calcolatori-Memoria_Permanente-Codice.pptx</a:t>
+              <a:t>16-Architettura_dei_Calcolatori-Memoria_Permanente-Lab.pptx</a:t>
             </a:r>
             <a:endParaRPr lang="en-US" sz="1300" dirty="0"/>
           </a:p>

--- a/it/slides/16-Architettura_dei_Calcolatori-Memoria_Permanente.pptx
+++ b/it/slides/16-Architettura_dei_Calcolatori-Memoria_Permanente.pptx
@@ -126,32 +126,32 @@
   <p:extLst>
     <p:ext uri="{521415D9-36F7-43E2-AB2F-B90AF26B5E84}">
       <p14:sectionLst xmlns:p14="http://schemas.microsoft.com/office/powerpoint/2010/main">
-        <p14:section name="Apertura" id="{84537771-1ff4-bc1d-b123-912c33535cad}">
+        <p14:section name="Apertura" id="{99be39cd-72bb-1452-ec6e-6144952e76db}">
           <p14:sldIdLst>
             <p14:sldId id="256"/>
             <p14:sldId id="257"/>
           </p14:sldIdLst>
         </p14:section>
-        <p14:section name="I componenti di un calcolatore" id="{769c6f48-9f4f-8bdb-e666-bb7d529be47d}">
+        <p14:section name="I componenti di un calcolatore" id="{642db033-70e6-dab4-3f03-4eb446143cc5}">
           <p14:sldIdLst>
             <p14:sldId id="258"/>
             <p14:sldId id="259"/>
           </p14:sldIdLst>
         </p14:section>
-        <p14:section name="Memorie non volatili" id="{27835e83-7da1-0fa7-d729-4efb3104f2c8}">
+        <p14:section name="Memorie non volatili" id="{7e4fd94c-a07e-57ac-a89c-0045eda79b07}">
           <p14:sldIdLst>
             <p14:sldId id="260"/>
             <p14:sldId id="261"/>
           </p14:sldIdLst>
         </p14:section>
-        <p14:section name="La cache" id="{f5db51bb-2f08-fbf3-f284-20332a5c1dbc}">
+        <p14:section name="La cache" id="{6d60dbec-32a2-82ce-888b-505ef822b1df}">
           <p14:sldIdLst>
             <p14:sldId id="262"/>
             <p14:sldId id="263"/>
             <p14:sldId id="264"/>
           </p14:sldIdLst>
         </p14:section>
-        <p14:section name="La memoria secondaria" id="{4b079192-dcb5-3e1d-12b6-fb041e85c3bc}">
+        <p14:section name="La memoria secondaria" id="{10d2b2a3-869d-02fe-caf6-7b9df6a60f46}">
           <p14:sldIdLst>
             <p14:sldId id="265"/>
             <p14:sldId id="266"/>
@@ -159,13 +159,13 @@
             <p14:sldId id="268"/>
           </p14:sldIdLst>
         </p14:section>
-        <p14:section name="Dischi ottici" id="{6e269f4a-d4c5-4746-6cbc-ce80adca4bf9}">
+        <p14:section name="Dischi ottici" id="{836daf97-d5fd-4a77-402e-35aa7d6caa9c}">
           <p14:sldIdLst>
             <p14:sldId id="269"/>
             <p14:sldId id="270"/>
           </p14:sldIdLst>
         </p14:section>
-        <p14:section name="La memoria di massa a più livelli" id="{c8118a14-08d4-cdf2-7eb4-597bdf843951}">
+        <p14:section name="La memoria di massa a più livelli" id="{bfcecb18-6c77-5411-e851-8078adde53c4}">
           <p14:sldIdLst>
             <p14:sldId id="271"/>
             <p14:sldId id="272"/>

--- a/it/slides/16-Architettura_dei_Calcolatori-Memoria_Permanente.pptx
+++ b/it/slides/16-Architettura_dei_Calcolatori-Memoria_Permanente.pptx
@@ -126,32 +126,32 @@
   <p:extLst>
     <p:ext uri="{521415D9-36F7-43E2-AB2F-B90AF26B5E84}">
       <p14:sectionLst xmlns:p14="http://schemas.microsoft.com/office/powerpoint/2010/main">
-        <p14:section name="Apertura" id="{99be39cd-72bb-1452-ec6e-6144952e76db}">
+        <p14:section name="Apertura" id="{e9d6d8dd-077a-912e-9dcf-39cb6b04b12c}">
           <p14:sldIdLst>
             <p14:sldId id="256"/>
             <p14:sldId id="257"/>
           </p14:sldIdLst>
         </p14:section>
-        <p14:section name="I componenti di un calcolatore" id="{642db033-70e6-dab4-3f03-4eb446143cc5}">
+        <p14:section name="I componenti di un calcolatore" id="{0156179d-96f7-9bca-e7f7-df1082a7eccf}">
           <p14:sldIdLst>
             <p14:sldId id="258"/>
             <p14:sldId id="259"/>
           </p14:sldIdLst>
         </p14:section>
-        <p14:section name="Memorie non volatili" id="{7e4fd94c-a07e-57ac-a89c-0045eda79b07}">
+        <p14:section name="Memorie non volatili" id="{63cdb2aa-2139-d3ac-d220-81f3d0d843b5}">
           <p14:sldIdLst>
             <p14:sldId id="260"/>
             <p14:sldId id="261"/>
           </p14:sldIdLst>
         </p14:section>
-        <p14:section name="La cache" id="{6d60dbec-32a2-82ce-888b-505ef822b1df}">
+        <p14:section name="La cache" id="{4f5afce4-aa31-9240-3838-2229bdcc9039}">
           <p14:sldIdLst>
             <p14:sldId id="262"/>
             <p14:sldId id="263"/>
             <p14:sldId id="264"/>
           </p14:sldIdLst>
         </p14:section>
-        <p14:section name="La memoria secondaria" id="{10d2b2a3-869d-02fe-caf6-7b9df6a60f46}">
+        <p14:section name="La memoria secondaria" id="{6a77ccf9-bbc2-58c1-187f-25359839dd88}">
           <p14:sldIdLst>
             <p14:sldId id="265"/>
             <p14:sldId id="266"/>
@@ -159,13 +159,13 @@
             <p14:sldId id="268"/>
           </p14:sldIdLst>
         </p14:section>
-        <p14:section name="Dischi ottici" id="{836daf97-d5fd-4a77-402e-35aa7d6caa9c}">
+        <p14:section name="Dischi ottici" id="{1ba817c9-6b3f-ce3b-fd07-59083310c3f7}">
           <p14:sldIdLst>
             <p14:sldId id="269"/>
             <p14:sldId id="270"/>
           </p14:sldIdLst>
         </p14:section>
-        <p14:section name="La memoria di massa a più livelli" id="{bfcecb18-6c77-5411-e851-8078adde53c4}">
+        <p14:section name="La memoria di massa a più livelli" id="{793c5701-1fb9-070d-a887-0fe63b044737}">
           <p14:sldIdLst>
             <p14:sldId id="271"/>
             <p14:sldId id="272"/>
@@ -581,6 +581,7 @@
               <a:t>La lezione precedente ha trattato la memoria che dimentica quando si toglie l'alimentazione. Questa tratta le memorie che non dimenticano: i chip che contengono il firmware, i dischi magnetici, i supporti ottici e i nastri. Tra le due colloca la cache, una piccola memoria veloce che nasconde la lentezza di una grande, e l'idea che unifica la lezione è che questa stessa strategia ricorre a ogni scala. La citazione è di un professore di calcolo numerico di questo Ateneo, e ogni studente prima o poi ne impara la verità: un dato non esiste finché non è stato salvato.
 Stato di apprendimento: DA COMPRENDERE OGGI, alla fine di questa lezione lo spiegate, lo seguite passo passo e lo applicate da soli; DA UTILIZZARE OGGI, oggi seguite e usate la ricetta; come funziona dentro si spiega più avanti, o non fa parte del corso; DA COMPRENDERE PIÙ AVANTI, riconoscete il nome e lo scopo; lo spiega una lezione successiva. Una slide senza etichetta è contesto: una storia, un esempio, una domanda, un esercizio.
 Stato di apprendimento di questa lezione. DA COMPRENDERE OGGI: ROM, flash, firmware; l'architettura di von Neumann; la cache; la memoria secondaria. DA UTILIZZARE OGGI: il programma completo, gli strumenti di PRG32 (si usa, non si studia, in questo corso). DA COMPRENDERE PIÙ AVANTI: niente. Una slide senza etichetta è contesto: una storia, un esempio, una domanda, un esercizio.
+Percorso. I risultati di oggi: (1) classificare le memorie permanenti e dire dove è conservata la cartuccia; (2) spiegare un successo e un fallimento di cache, e la località; (3) confrontare i tempi di accesso di dischi e memorie a stato solido. Si appoggia su: l'architettura di von Neumann (Lezione 03). Prossimo passo: Lezione 17, Verm1, parte 3: un corpo, regole e stati.
 Per il docente: Spirale: una cartuccia conserva la stringa del titolo dopo uno spegnimento ma perde il punteggio migliore; la lezione spiega dove vive ciascuno, poi tratta ROM e flash, la cache, e la memoria di massa.</a:t>
             </a:r>
             <a:endParaRPr lang="en-US" dirty="0"/>
@@ -1661,7 +1662,7 @@
             <a:r>
               <a:rPr lang="en-US" dirty="0"/>
               <a:t>Cinque conclusioni. Le memorie non volatili contengono tipicamente il firmware, il software di base di una macchina. La cache migliora le prestazioni tenendo una copia di parte della memoria centrale vicino al processore. La stessa idea, un livello piccolo e veloce davanti a uno grande e lento, ricorre nei sistemi di memorizzazione. Le memorie permanenti possono essere a semiconduttore, magnetiche od ottiche. E un sistema moderno comprende più livelli, gestiti automaticamente. Segue la Parte 3 di Verm1, che usa la memoria come il progetto non l'ha ancora usata.
-Stato di apprendimento, riepilogo. DA COMPRENDERE OGGI: ROM, flash, firmware; l'architettura di von Neumann; la cache; la memoria secondaria. DA UTILIZZARE OGGI: il programma completo, gli strumenti di PRG32 (si usa, non si studia, in questo corso). DA COMPRENDERE PIÙ AVANTI: niente. Una slide senza etichetta è contesto: una storia, un esempio, una domanda, un esercizio.
+Stato di apprendimento, riepilogo. DA COMPRENDERE OGGI: ROM, flash, firmware; l'architettura di von Neumann; la cache; la memoria secondaria. DA UTILIZZARE OGGI: il programma completo, gli strumenti di PRG32 (si usa, non si studia, in questo corso). DA COMPRENDERE PIÙ AVANTI: niente. Una slide senza etichetta è contesto: una storia, un esempio, una domanda, un esercizio. Il filo della lezione: La memoria è una gerarchia: piccola e veloce vicino al processore, grande e lenta lontano, e la località fa funzionare il trucco. Prossimo passo: la terza parte di Verm1, che ha bisogno di memoria per un corpo intero. Biglietto d'uscita (da due a quattro minuti, da soli, su carta): 1. Che cosa succede in caso di fallimento di cache? Perché un ciclo che legge un array in ordine ha pochi fallimenti? 2. Perché il firmware e le cartucce del kit non possono stare solo in RAM? Quale memoria li conserva, e qual è il suo limite?
 Per il docente: A seguire: Verm1, parte 3: un corpo, regole e stati. Poi il processore.</a:t>
             </a:r>
             <a:endParaRPr lang="en-US" dirty="0"/>
